--- a/Philippine Airlines Passenger Review Analysis Milestone 2 Report.pptx
+++ b/Philippine Airlines Passenger Review Analysis Milestone 2 Report.pptx
@@ -5,45 +5,53 @@
     <p:sldMasterId id="2147483648" r:id="rId1"/>
   </p:sldMasterIdLst>
   <p:notesMasterIdLst>
-    <p:notesMasterId r:id="rId19"/>
+    <p:notesMasterId r:id="rId22"/>
   </p:notesMasterIdLst>
   <p:sldIdLst>
     <p:sldId id="256" r:id="rId2"/>
     <p:sldId id="271" r:id="rId3"/>
-    <p:sldId id="257" r:id="rId4"/>
-    <p:sldId id="260" r:id="rId5"/>
-    <p:sldId id="259" r:id="rId6"/>
-    <p:sldId id="263" r:id="rId7"/>
-    <p:sldId id="261" r:id="rId8"/>
-    <p:sldId id="264" r:id="rId9"/>
-    <p:sldId id="272" r:id="rId10"/>
-    <p:sldId id="262" r:id="rId11"/>
-    <p:sldId id="265" r:id="rId12"/>
-    <p:sldId id="258" r:id="rId13"/>
-    <p:sldId id="266" r:id="rId14"/>
-    <p:sldId id="267" r:id="rId15"/>
-    <p:sldId id="268" r:id="rId16"/>
-    <p:sldId id="269" r:id="rId17"/>
-    <p:sldId id="270" r:id="rId18"/>
+    <p:sldId id="273" r:id="rId4"/>
+    <p:sldId id="257" r:id="rId5"/>
+    <p:sldId id="260" r:id="rId6"/>
+    <p:sldId id="259" r:id="rId7"/>
+    <p:sldId id="263" r:id="rId8"/>
+    <p:sldId id="274" r:id="rId9"/>
+    <p:sldId id="261" r:id="rId10"/>
+    <p:sldId id="264" r:id="rId11"/>
+    <p:sldId id="272" r:id="rId12"/>
+    <p:sldId id="262" r:id="rId13"/>
+    <p:sldId id="265" r:id="rId14"/>
+    <p:sldId id="275" r:id="rId15"/>
+    <p:sldId id="258" r:id="rId16"/>
+    <p:sldId id="266" r:id="rId17"/>
+    <p:sldId id="267" r:id="rId18"/>
+    <p:sldId id="268" r:id="rId19"/>
+    <p:sldId id="269" r:id="rId20"/>
+    <p:sldId id="270" r:id="rId21"/>
   </p:sldIdLst>
   <p:sldSz cx="18288000" cy="10287000"/>
   <p:notesSz cx="6858000" cy="9144000"/>
   <p:embeddedFontLst>
     <p:embeddedFont>
       <p:font typeface="Inter Extra-Light" panose="020B0604020202020204" charset="0"/>
-      <p:regular r:id="rId20"/>
+      <p:regular r:id="rId23"/>
     </p:embeddedFont>
     <p:embeddedFont>
       <p:font typeface="Poppins" panose="00000500000000000000" pitchFamily="2" charset="0"/>
-      <p:regular r:id="rId21"/>
+      <p:regular r:id="rId24"/>
+      <p:bold r:id="rId25"/>
+      <p:italic r:id="rId26"/>
+      <p:boldItalic r:id="rId27"/>
     </p:embeddedFont>
     <p:embeddedFont>
       <p:font typeface="Poppins Light" panose="00000400000000000000" pitchFamily="2" charset="0"/>
-      <p:regular r:id="rId22"/>
+      <p:regular r:id="rId28"/>
+      <p:italic r:id="rId29"/>
     </p:embeddedFont>
     <p:embeddedFont>
       <p:font typeface="Poppins Medium" panose="00000600000000000000" pitchFamily="2" charset="0"/>
-      <p:regular r:id="rId23"/>
+      <p:regular r:id="rId30"/>
+      <p:italic r:id="rId31"/>
     </p:embeddedFont>
   </p:embeddedFontLst>
   <p:defaultTextStyle>
@@ -242,7 +250,7 @@
           <a:p>
             <a:fld id="{E2DAA40C-B144-4F89-A021-4BC12882735B}" type="datetimeFigureOut">
               <a:rPr lang="en-PH" smtClean="0"/>
-              <a:t>9/9/2026</a:t>
+              <a:t>09/09/2026</a:t>
             </a:fld>
             <a:endParaRPr lang="en-PH"/>
           </a:p>
@@ -575,7 +583,7 @@
           <a:p>
             <a:fld id="{82F5806C-D682-45E3-9EAD-1531CF4CF647}" type="slidenum">
               <a:rPr lang="en-PH" smtClean="0"/>
-              <a:t>6</a:t>
+              <a:t>7</a:t>
             </a:fld>
             <a:endParaRPr lang="en-PH"/>
           </a:p>
@@ -585,6 +593,114 @@
     <p:extLst>
       <p:ext uri="{BB962C8B-B14F-4D97-AF65-F5344CB8AC3E}">
         <p14:creationId xmlns:p14="http://schemas.microsoft.com/office/powerpoint/2010/main" val="1913286527"/>
+      </p:ext>
+    </p:extLst>
+  </p:cSld>
+  <p:clrMapOvr>
+    <a:masterClrMapping/>
+  </p:clrMapOvr>
+</p:notes>
+</file>
+
+<file path=ppt/notesSlides/notesSlide2.xml><?xml version="1.0" encoding="utf-8"?>
+<p:notes xmlns:a="http://schemas.openxmlformats.org/drawingml/2006/main" xmlns:r="http://schemas.openxmlformats.org/officeDocument/2006/relationships" xmlns:p="http://schemas.openxmlformats.org/presentationml/2006/main">
+  <p:cSld>
+    <p:spTree>
+      <p:nvGrpSpPr>
+        <p:cNvPr id="1" name="">
+          <a:extLst>
+            <a:ext uri="{FF2B5EF4-FFF2-40B4-BE49-F238E27FC236}">
+              <a16:creationId xmlns:a16="http://schemas.microsoft.com/office/drawing/2014/main" id="{5DEC9520-5F93-2D7C-C9A1-1324F11848C9}"/>
+            </a:ext>
+          </a:extLst>
+        </p:cNvPr>
+        <p:cNvGrpSpPr/>
+        <p:nvPr/>
+      </p:nvGrpSpPr>
+      <p:grpSpPr>
+        <a:xfrm>
+          <a:off x="0" y="0"/>
+          <a:ext cx="0" cy="0"/>
+          <a:chOff x="0" y="0"/>
+          <a:chExt cx="0" cy="0"/>
+        </a:xfrm>
+      </p:grpSpPr>
+      <p:sp>
+        <p:nvSpPr>
+          <p:cNvPr id="2" name="Slide Image Placeholder 1">
+            <a:extLst>
+              <a:ext uri="{FF2B5EF4-FFF2-40B4-BE49-F238E27FC236}">
+                <a16:creationId xmlns:a16="http://schemas.microsoft.com/office/drawing/2014/main" id="{66276709-017F-511B-981A-526EF98919A3}"/>
+              </a:ext>
+            </a:extLst>
+          </p:cNvPr>
+          <p:cNvSpPr>
+            <a:spLocks noGrp="1" noRot="1" noChangeAspect="1"/>
+          </p:cNvSpPr>
+          <p:nvPr>
+            <p:ph type="sldImg"/>
+          </p:nvPr>
+        </p:nvSpPr>
+        <p:spPr/>
+      </p:sp>
+      <p:sp>
+        <p:nvSpPr>
+          <p:cNvPr id="3" name="Notes Placeholder 2">
+            <a:extLst>
+              <a:ext uri="{FF2B5EF4-FFF2-40B4-BE49-F238E27FC236}">
+                <a16:creationId xmlns:a16="http://schemas.microsoft.com/office/drawing/2014/main" id="{4EDBD336-DDCB-9756-83D2-8AEB3D7A1DED}"/>
+              </a:ext>
+            </a:extLst>
+          </p:cNvPr>
+          <p:cNvSpPr>
+            <a:spLocks noGrp="1"/>
+          </p:cNvSpPr>
+          <p:nvPr>
+            <p:ph type="body" idx="1"/>
+          </p:nvPr>
+        </p:nvSpPr>
+        <p:spPr/>
+        <p:txBody>
+          <a:bodyPr/>
+          <a:lstStyle/>
+          <a:p>
+            <a:endParaRPr lang="en-PH" dirty="0"/>
+          </a:p>
+        </p:txBody>
+      </p:sp>
+      <p:sp>
+        <p:nvSpPr>
+          <p:cNvPr id="4" name="Slide Number Placeholder 3">
+            <a:extLst>
+              <a:ext uri="{FF2B5EF4-FFF2-40B4-BE49-F238E27FC236}">
+                <a16:creationId xmlns:a16="http://schemas.microsoft.com/office/drawing/2014/main" id="{55FA0DEC-DF93-B04A-ACFB-5B40497B0558}"/>
+              </a:ext>
+            </a:extLst>
+          </p:cNvPr>
+          <p:cNvSpPr>
+            <a:spLocks noGrp="1"/>
+          </p:cNvSpPr>
+          <p:nvPr>
+            <p:ph type="sldNum" sz="quarter" idx="5"/>
+          </p:nvPr>
+        </p:nvSpPr>
+        <p:spPr/>
+        <p:txBody>
+          <a:bodyPr/>
+          <a:lstStyle/>
+          <a:p>
+            <a:fld id="{82F5806C-D682-45E3-9EAD-1531CF4CF647}" type="slidenum">
+              <a:rPr lang="en-PH" smtClean="0"/>
+              <a:t>8</a:t>
+            </a:fld>
+            <a:endParaRPr lang="en-PH"/>
+          </a:p>
+        </p:txBody>
+      </p:sp>
+    </p:spTree>
+    <p:extLst>
+      <p:ext uri="{BB962C8B-B14F-4D97-AF65-F5344CB8AC3E}">
+        <p14:creationId xmlns:p14="http://schemas.microsoft.com/office/powerpoint/2010/main" val="1243179073"/>
       </p:ext>
     </p:extLst>
   </p:cSld>
@@ -3576,6 +3692,13 @@
             <a:tailEnd type="none" w="sm" len="sm"/>
           </a:ln>
         </p:spPr>
+        <p:txBody>
+          <a:bodyPr/>
+          <a:lstStyle/>
+          <a:p>
+            <a:endParaRPr lang="en-PH"/>
+          </a:p>
+        </p:txBody>
       </p:sp>
       <p:sp>
         <p:nvSpPr>
@@ -3824,6 +3947,13 @@
               <a:round/>
             </a:ln>
           </p:spPr>
+          <p:txBody>
+            <a:bodyPr/>
+            <a:lstStyle/>
+            <a:p>
+              <a:endParaRPr lang="en-PH"/>
+            </a:p>
+          </p:txBody>
         </p:sp>
       </p:grpSp>
     </p:spTree>
@@ -3902,6 +4032,582 @@
             <a:tailEnd type="none" w="sm" len="sm"/>
           </a:ln>
         </p:spPr>
+        <p:txBody>
+          <a:bodyPr/>
+          <a:lstStyle/>
+          <a:p>
+            <a:endParaRPr lang="en-PH"/>
+          </a:p>
+        </p:txBody>
+      </p:sp>
+      <p:grpSp>
+        <p:nvGrpSpPr>
+          <p:cNvPr id="3" name="Group 3"/>
+          <p:cNvGrpSpPr/>
+          <p:nvPr/>
+        </p:nvGrpSpPr>
+        <p:grpSpPr>
+          <a:xfrm>
+            <a:off x="685800" y="1714500"/>
+            <a:ext cx="8839378" cy="6648234"/>
+            <a:chOff x="0" y="0"/>
+            <a:chExt cx="11785838" cy="8864312"/>
+          </a:xfrm>
+        </p:grpSpPr>
+        <p:sp>
+          <p:nvSpPr>
+            <p:cNvPr id="4" name="TextBox 4"/>
+            <p:cNvSpPr txBox="1"/>
+            <p:nvPr/>
+          </p:nvSpPr>
+          <p:spPr>
+            <a:xfrm>
+              <a:off x="0" y="114300"/>
+              <a:ext cx="11785838" cy="1619250"/>
+            </a:xfrm>
+            <a:prstGeom prst="rect">
+              <a:avLst/>
+            </a:prstGeom>
+          </p:spPr>
+          <p:txBody>
+            <a:bodyPr lIns="0" tIns="0" rIns="0" bIns="0" rtlCol="0" anchor="t">
+              <a:spAutoFit/>
+            </a:bodyPr>
+            <a:lstStyle/>
+            <a:p>
+              <a:pPr marL="0" lvl="0" indent="0" algn="l">
+                <a:lnSpc>
+                  <a:spcPts val="8122"/>
+                </a:lnSpc>
+              </a:pPr>
+              <a:r>
+                <a:rPr lang="en-US" sz="8550" b="1" spc="-359">
+                  <a:solidFill>
+                    <a:srgbClr val="F4F4F4"/>
+                  </a:solidFill>
+                  <a:latin typeface="Poppins Medium"/>
+                  <a:ea typeface="Poppins Medium"/>
+                  <a:cs typeface="Poppins Medium"/>
+                  <a:sym typeface="Poppins Medium"/>
+                </a:rPr>
+                <a:t>Route Analysis</a:t>
+              </a:r>
+            </a:p>
+          </p:txBody>
+        </p:sp>
+        <p:sp>
+          <p:nvSpPr>
+            <p:cNvPr id="5" name="TextBox 5"/>
+            <p:cNvSpPr txBox="1"/>
+            <p:nvPr/>
+          </p:nvSpPr>
+          <p:spPr>
+            <a:xfrm>
+              <a:off x="0" y="4636321"/>
+              <a:ext cx="9289355" cy="1311040"/>
+            </a:xfrm>
+            <a:prstGeom prst="rect">
+              <a:avLst/>
+            </a:prstGeom>
+          </p:spPr>
+          <p:txBody>
+            <a:bodyPr lIns="0" tIns="0" rIns="0" bIns="0" rtlCol="0" anchor="t">
+              <a:spAutoFit/>
+            </a:bodyPr>
+            <a:lstStyle/>
+            <a:p>
+              <a:pPr marL="0" lvl="0" indent="0" algn="l">
+                <a:lnSpc>
+                  <a:spcPts val="3947"/>
+                </a:lnSpc>
+                <a:spcBef>
+                  <a:spcPct val="0"/>
+                </a:spcBef>
+              </a:pPr>
+              <a:r>
+                <a:rPr lang="en-US" sz="2819" spc="-118">
+                  <a:solidFill>
+                    <a:srgbClr val="F4F4F4"/>
+                  </a:solidFill>
+                  <a:latin typeface="Poppins"/>
+                  <a:ea typeface="Poppins"/>
+                  <a:cs typeface="Poppins"/>
+                  <a:sym typeface="Poppins"/>
+                </a:rPr>
+                <a:t>Seat Comfort by Route &amp; Top Aircraft Performance</a:t>
+              </a:r>
+            </a:p>
+          </p:txBody>
+        </p:sp>
+        <p:sp>
+          <p:nvSpPr>
+            <p:cNvPr id="6" name="TextBox 6"/>
+            <p:cNvSpPr txBox="1"/>
+            <p:nvPr/>
+          </p:nvSpPr>
+          <p:spPr>
+            <a:xfrm>
+              <a:off x="0" y="6670561"/>
+              <a:ext cx="9289355" cy="2193752"/>
+            </a:xfrm>
+            <a:prstGeom prst="rect">
+              <a:avLst/>
+            </a:prstGeom>
+          </p:spPr>
+          <p:txBody>
+            <a:bodyPr lIns="0" tIns="0" rIns="0" bIns="0" rtlCol="0" anchor="t">
+              <a:spAutoFit/>
+            </a:bodyPr>
+            <a:lstStyle/>
+            <a:p>
+              <a:pPr marL="0" lvl="0" indent="0" algn="just">
+                <a:lnSpc>
+                  <a:spcPts val="2238"/>
+                </a:lnSpc>
+                <a:spcBef>
+                  <a:spcPct val="0"/>
+                </a:spcBef>
+              </a:pPr>
+              <a:r>
+                <a:rPr lang="en-US" sz="1598" dirty="0">
+                  <a:solidFill>
+                    <a:srgbClr val="F4F4F4"/>
+                  </a:solidFill>
+                  <a:latin typeface="Inter Extra-Light"/>
+                  <a:ea typeface="Inter Extra-Light"/>
+                  <a:cs typeface="Inter Extra-Light"/>
+                  <a:sym typeface="Inter Extra-Light"/>
+                </a:rPr>
+                <a:t>Route-level analysis reveals significant variation in seat comfort scores across destinations. Long-haul international routes tend to show lower comfort ratings, while select regional routes perform better. Aircraft type plays a key role: wide-body aircraft consistently receive higher ratings. Top-performing aircraft models show stronger overall satisfaction, reinforcing the link between equipment and passenger experience.</a:t>
+              </a:r>
+            </a:p>
+          </p:txBody>
+        </p:sp>
+      </p:grpSp>
+      <p:pic>
+        <p:nvPicPr>
+          <p:cNvPr id="14" name="Picture 13">
+            <a:extLst>
+              <a:ext uri="{FF2B5EF4-FFF2-40B4-BE49-F238E27FC236}">
+                <a16:creationId xmlns:a16="http://schemas.microsoft.com/office/drawing/2014/main" id="{C5B3AF55-B6F8-CB36-191D-7A16D22004CC}"/>
+              </a:ext>
+            </a:extLst>
+          </p:cNvPr>
+          <p:cNvPicPr>
+            <a:picLocks noChangeAspect="1"/>
+          </p:cNvPicPr>
+          <p:nvPr/>
+        </p:nvPicPr>
+        <p:blipFill>
+          <a:blip r:embed="rId2">
+            <a:extLst>
+              <a:ext uri="{28A0092B-C50C-407E-A947-70E740481C1C}">
+                <a14:useLocalDpi xmlns:a14="http://schemas.microsoft.com/office/drawing/2010/main" val="0"/>
+              </a:ext>
+            </a:extLst>
+          </a:blip>
+          <a:stretch>
+            <a:fillRect/>
+          </a:stretch>
+        </p:blipFill>
+        <p:spPr>
+          <a:xfrm>
+            <a:off x="8055362" y="2857500"/>
+            <a:ext cx="9827992" cy="4876800"/>
+          </a:xfrm>
+          <a:prstGeom prst="rect">
+            <a:avLst/>
+          </a:prstGeom>
+        </p:spPr>
+      </p:pic>
+    </p:spTree>
+  </p:cSld>
+  <p:clrMapOvr>
+    <a:masterClrMapping/>
+  </p:clrMapOvr>
+</p:sld>
+</file>
+
+<file path=ppt/slides/slide11.xml><?xml version="1.0" encoding="utf-8"?>
+<p:sld xmlns:a="http://schemas.openxmlformats.org/drawingml/2006/main" xmlns:r="http://schemas.openxmlformats.org/officeDocument/2006/relationships" xmlns:p="http://schemas.openxmlformats.org/presentationml/2006/main">
+  <p:cSld>
+    <p:bg>
+      <p:bgPr>
+        <a:gradFill rotWithShape="1">
+          <a:gsLst>
+            <a:gs pos="0">
+              <a:srgbClr val="6B1124">
+                <a:alpha val="100000"/>
+              </a:srgbClr>
+            </a:gs>
+            <a:gs pos="50000">
+              <a:srgbClr val="000000">
+                <a:alpha val="100000"/>
+              </a:srgbClr>
+            </a:gs>
+            <a:gs pos="100000">
+              <a:srgbClr val="6B1124">
+                <a:alpha val="100000"/>
+              </a:srgbClr>
+            </a:gs>
+          </a:gsLst>
+          <a:path path="circle">
+            <a:fillToRect r="100000" b="100000"/>
+          </a:path>
+          <a:tileRect l="-100000" t="-100000"/>
+        </a:gradFill>
+        <a:effectLst/>
+      </p:bgPr>
+    </p:bg>
+    <p:spTree>
+      <p:nvGrpSpPr>
+        <p:cNvPr id="1" name="">
+          <a:extLst>
+            <a:ext uri="{FF2B5EF4-FFF2-40B4-BE49-F238E27FC236}">
+              <a16:creationId xmlns:a16="http://schemas.microsoft.com/office/drawing/2014/main" id="{ED980F17-B991-D88D-18ED-384CBD60336F}"/>
+            </a:ext>
+          </a:extLst>
+        </p:cNvPr>
+        <p:cNvGrpSpPr/>
+        <p:nvPr/>
+      </p:nvGrpSpPr>
+      <p:grpSpPr>
+        <a:xfrm>
+          <a:off x="0" y="0"/>
+          <a:ext cx="0" cy="0"/>
+          <a:chOff x="0" y="0"/>
+          <a:chExt cx="0" cy="0"/>
+        </a:xfrm>
+      </p:grpSpPr>
+      <p:sp>
+        <p:nvSpPr>
+          <p:cNvPr id="2" name="AutoShape 2">
+            <a:extLst>
+              <a:ext uri="{FF2B5EF4-FFF2-40B4-BE49-F238E27FC236}">
+                <a16:creationId xmlns:a16="http://schemas.microsoft.com/office/drawing/2014/main" id="{939DE53B-8C97-5A3C-B15A-98AE4B94A528}"/>
+              </a:ext>
+            </a:extLst>
+          </p:cNvPr>
+          <p:cNvSpPr/>
+          <p:nvPr/>
+        </p:nvSpPr>
+        <p:spPr>
+          <a:xfrm flipV="1">
+            <a:off x="0" y="5143500"/>
+            <a:ext cx="18288000" cy="0"/>
+          </a:xfrm>
+          <a:prstGeom prst="line">
+            <a:avLst/>
+          </a:prstGeom>
+          <a:ln w="9525" cap="rnd">
+            <a:solidFill>
+              <a:srgbClr val="F4F4F4"/>
+            </a:solidFill>
+            <a:prstDash val="solid"/>
+            <a:headEnd type="none" w="sm" len="sm"/>
+            <a:tailEnd type="none" w="sm" len="sm"/>
+          </a:ln>
+        </p:spPr>
+        <p:txBody>
+          <a:bodyPr/>
+          <a:lstStyle/>
+          <a:p>
+            <a:endParaRPr lang="en-PH"/>
+          </a:p>
+        </p:txBody>
+      </p:sp>
+      <p:grpSp>
+        <p:nvGrpSpPr>
+          <p:cNvPr id="3" name="Group 3">
+            <a:extLst>
+              <a:ext uri="{FF2B5EF4-FFF2-40B4-BE49-F238E27FC236}">
+                <a16:creationId xmlns:a16="http://schemas.microsoft.com/office/drawing/2014/main" id="{AB0212D4-8AB7-E83A-E371-BC1C88BCA0F1}"/>
+              </a:ext>
+            </a:extLst>
+          </p:cNvPr>
+          <p:cNvGrpSpPr/>
+          <p:nvPr/>
+        </p:nvGrpSpPr>
+        <p:grpSpPr>
+          <a:xfrm>
+            <a:off x="1028700" y="1776560"/>
+            <a:ext cx="8839378" cy="6093187"/>
+            <a:chOff x="0" y="114300"/>
+            <a:chExt cx="11785838" cy="8124249"/>
+          </a:xfrm>
+        </p:grpSpPr>
+        <p:sp>
+          <p:nvSpPr>
+            <p:cNvPr id="4" name="TextBox 4">
+              <a:extLst>
+                <a:ext uri="{FF2B5EF4-FFF2-40B4-BE49-F238E27FC236}">
+                  <a16:creationId xmlns:a16="http://schemas.microsoft.com/office/drawing/2014/main" id="{A8940170-BFE9-400F-B39B-F651382D4C5C}"/>
+                </a:ext>
+              </a:extLst>
+            </p:cNvPr>
+            <p:cNvSpPr txBox="1"/>
+            <p:nvPr/>
+          </p:nvSpPr>
+          <p:spPr>
+            <a:xfrm>
+              <a:off x="0" y="114300"/>
+              <a:ext cx="11785838" cy="1619250"/>
+            </a:xfrm>
+            <a:prstGeom prst="rect">
+              <a:avLst/>
+            </a:prstGeom>
+          </p:spPr>
+          <p:txBody>
+            <a:bodyPr lIns="0" tIns="0" rIns="0" bIns="0" rtlCol="0" anchor="t">
+              <a:spAutoFit/>
+            </a:bodyPr>
+            <a:lstStyle/>
+            <a:p>
+              <a:pPr marL="0" lvl="0" indent="0" algn="l">
+                <a:lnSpc>
+                  <a:spcPts val="8122"/>
+                </a:lnSpc>
+              </a:pPr>
+              <a:r>
+                <a:rPr lang="en-US" sz="8550" b="1" spc="-359">
+                  <a:solidFill>
+                    <a:srgbClr val="F4F4F4"/>
+                  </a:solidFill>
+                  <a:latin typeface="Poppins Medium"/>
+                  <a:ea typeface="Poppins Medium"/>
+                  <a:cs typeface="Poppins Medium"/>
+                  <a:sym typeface="Poppins Medium"/>
+                </a:rPr>
+                <a:t>Overall Ratings</a:t>
+              </a:r>
+            </a:p>
+          </p:txBody>
+        </p:sp>
+        <p:sp>
+          <p:nvSpPr>
+            <p:cNvPr id="5" name="TextBox 5">
+              <a:extLst>
+                <a:ext uri="{FF2B5EF4-FFF2-40B4-BE49-F238E27FC236}">
+                  <a16:creationId xmlns:a16="http://schemas.microsoft.com/office/drawing/2014/main" id="{26D22F9D-F679-7215-D0C1-C0058DB15710}"/>
+                </a:ext>
+              </a:extLst>
+            </p:cNvPr>
+            <p:cNvSpPr txBox="1"/>
+            <p:nvPr/>
+          </p:nvSpPr>
+          <p:spPr>
+            <a:xfrm>
+              <a:off x="0" y="4636321"/>
+              <a:ext cx="9289355" cy="650640"/>
+            </a:xfrm>
+            <a:prstGeom prst="rect">
+              <a:avLst/>
+            </a:prstGeom>
+          </p:spPr>
+          <p:txBody>
+            <a:bodyPr lIns="0" tIns="0" rIns="0" bIns="0" rtlCol="0" anchor="t">
+              <a:spAutoFit/>
+            </a:bodyPr>
+            <a:lstStyle/>
+            <a:p>
+              <a:pPr marL="0" lvl="0" indent="0" algn="l">
+                <a:lnSpc>
+                  <a:spcPts val="3947"/>
+                </a:lnSpc>
+                <a:spcBef>
+                  <a:spcPct val="0"/>
+                </a:spcBef>
+              </a:pPr>
+              <a:r>
+                <a:rPr lang="en-US" sz="2819" spc="-118">
+                  <a:solidFill>
+                    <a:srgbClr val="F4F4F4"/>
+                  </a:solidFill>
+                  <a:latin typeface="Poppins"/>
+                  <a:ea typeface="Poppins"/>
+                  <a:cs typeface="Poppins"/>
+                  <a:sym typeface="Poppins"/>
+                </a:rPr>
+                <a:t>Rating Distribution by Service Category</a:t>
+              </a:r>
+            </a:p>
+          </p:txBody>
+        </p:sp>
+        <p:sp>
+          <p:nvSpPr>
+            <p:cNvPr id="6" name="TextBox 6">
+              <a:extLst>
+                <a:ext uri="{FF2B5EF4-FFF2-40B4-BE49-F238E27FC236}">
+                  <a16:creationId xmlns:a16="http://schemas.microsoft.com/office/drawing/2014/main" id="{87A4B63F-1548-AE4B-FD96-B5E1FE7FABA7}"/>
+                </a:ext>
+              </a:extLst>
+            </p:cNvPr>
+            <p:cNvSpPr txBox="1"/>
+            <p:nvPr/>
+          </p:nvSpPr>
+          <p:spPr>
+            <a:xfrm>
+              <a:off x="0" y="6010161"/>
+              <a:ext cx="9289355" cy="2228388"/>
+            </a:xfrm>
+            <a:prstGeom prst="rect">
+              <a:avLst/>
+            </a:prstGeom>
+          </p:spPr>
+          <p:txBody>
+            <a:bodyPr lIns="0" tIns="0" rIns="0" bIns="0" rtlCol="0" anchor="t">
+              <a:spAutoFit/>
+            </a:bodyPr>
+            <a:lstStyle/>
+            <a:p>
+              <a:pPr marL="0" lvl="0" indent="0" algn="just">
+                <a:lnSpc>
+                  <a:spcPts val="2238"/>
+                </a:lnSpc>
+                <a:spcBef>
+                  <a:spcPct val="0"/>
+                </a:spcBef>
+              </a:pPr>
+              <a:r>
+                <a:rPr lang="en-US" sz="1598" dirty="0">
+                  <a:solidFill>
+                    <a:srgbClr val="F4F4F4"/>
+                  </a:solidFill>
+                  <a:latin typeface="Inter Extra-Light"/>
+                  <a:ea typeface="Inter Extra-Light"/>
+                  <a:cs typeface="Inter Extra-Light"/>
+                  <a:sym typeface="Inter Extra-Light"/>
+                </a:rPr>
+                <a:t>Cabin Staff Service and Seat Comfort earn the highest ratings, clustering near 4–5 on recommended flights. Food &amp; Beverages and Inflight Entertainment sit mid‑range, while Ground Service and Value for Money show the widest variation, reflecting inconsistency across routes. Strong staff service and comfort emerge as the most reliable drivers of positive recommendations.</a:t>
+              </a:r>
+            </a:p>
+          </p:txBody>
+        </p:sp>
+      </p:grpSp>
+      <p:pic>
+        <p:nvPicPr>
+          <p:cNvPr id="14" name="Picture 13">
+            <a:extLst>
+              <a:ext uri="{FF2B5EF4-FFF2-40B4-BE49-F238E27FC236}">
+                <a16:creationId xmlns:a16="http://schemas.microsoft.com/office/drawing/2014/main" id="{0880C706-8645-EA20-1384-8CB400AAA862}"/>
+              </a:ext>
+            </a:extLst>
+          </p:cNvPr>
+          <p:cNvPicPr>
+            <a:picLocks noChangeAspect="1"/>
+          </p:cNvPicPr>
+          <p:nvPr/>
+        </p:nvPicPr>
+        <p:blipFill>
+          <a:blip r:embed="rId2">
+            <a:extLst>
+              <a:ext uri="{28A0092B-C50C-407E-A947-70E740481C1C}">
+                <a14:useLocalDpi xmlns:a14="http://schemas.microsoft.com/office/drawing/2010/main" val="0"/>
+              </a:ext>
+            </a:extLst>
+          </a:blip>
+          <a:stretch>
+            <a:fillRect/>
+          </a:stretch>
+        </p:blipFill>
+        <p:spPr>
+          <a:xfrm>
+            <a:off x="8686800" y="3314700"/>
+            <a:ext cx="8839378" cy="4386235"/>
+          </a:xfrm>
+          <a:prstGeom prst="rect">
+            <a:avLst/>
+          </a:prstGeom>
+        </p:spPr>
+      </p:pic>
+    </p:spTree>
+    <p:extLst>
+      <p:ext uri="{BB962C8B-B14F-4D97-AF65-F5344CB8AC3E}">
+        <p14:creationId xmlns:p14="http://schemas.microsoft.com/office/powerpoint/2010/main" val="663113684"/>
+      </p:ext>
+    </p:extLst>
+  </p:cSld>
+  <p:clrMapOvr>
+    <a:masterClrMapping/>
+  </p:clrMapOvr>
+</p:sld>
+</file>
+
+<file path=ppt/slides/slide12.xml><?xml version="1.0" encoding="utf-8"?>
+<p:sld xmlns:a="http://schemas.openxmlformats.org/drawingml/2006/main" xmlns:r="http://schemas.openxmlformats.org/officeDocument/2006/relationships" xmlns:p="http://schemas.openxmlformats.org/presentationml/2006/main">
+  <p:cSld>
+    <p:bg>
+      <p:bgPr>
+        <a:gradFill rotWithShape="1">
+          <a:gsLst>
+            <a:gs pos="0">
+              <a:srgbClr val="6B1124">
+                <a:alpha val="100000"/>
+              </a:srgbClr>
+            </a:gs>
+            <a:gs pos="50000">
+              <a:srgbClr val="000000">
+                <a:alpha val="100000"/>
+              </a:srgbClr>
+            </a:gs>
+            <a:gs pos="100000">
+              <a:srgbClr val="6B1124">
+                <a:alpha val="100000"/>
+              </a:srgbClr>
+            </a:gs>
+          </a:gsLst>
+          <a:path path="circle">
+            <a:fillToRect r="100000" b="100000"/>
+          </a:path>
+          <a:tileRect l="-100000" t="-100000"/>
+        </a:gradFill>
+        <a:effectLst/>
+      </p:bgPr>
+    </p:bg>
+    <p:spTree>
+      <p:nvGrpSpPr>
+        <p:cNvPr id="1" name=""/>
+        <p:cNvGrpSpPr/>
+        <p:nvPr/>
+      </p:nvGrpSpPr>
+      <p:grpSpPr>
+        <a:xfrm>
+          <a:off x="0" y="0"/>
+          <a:ext cx="0" cy="0"/>
+          <a:chOff x="0" y="0"/>
+          <a:chExt cx="0" cy="0"/>
+        </a:xfrm>
+      </p:grpSpPr>
+      <p:sp>
+        <p:nvSpPr>
+          <p:cNvPr id="2" name="AutoShape 2"/>
+          <p:cNvSpPr/>
+          <p:nvPr/>
+        </p:nvSpPr>
+        <p:spPr>
+          <a:xfrm flipV="1">
+            <a:off x="0" y="5143500"/>
+            <a:ext cx="18288000" cy="0"/>
+          </a:xfrm>
+          <a:prstGeom prst="line">
+            <a:avLst/>
+          </a:prstGeom>
+          <a:ln w="9525" cap="rnd">
+            <a:solidFill>
+              <a:srgbClr val="F4F4F4"/>
+            </a:solidFill>
+            <a:prstDash val="solid"/>
+            <a:headEnd type="none" w="sm" len="sm"/>
+            <a:tailEnd type="none" w="sm" len="sm"/>
+          </a:ln>
+        </p:spPr>
+        <p:txBody>
+          <a:bodyPr/>
+          <a:lstStyle/>
+          <a:p>
+            <a:endParaRPr lang="en-PH"/>
+          </a:p>
+        </p:txBody>
       </p:sp>
       <p:sp>
         <p:nvSpPr>
@@ -4097,6 +4803,13 @@
               <a:round/>
             </a:ln>
           </p:spPr>
+          <p:txBody>
+            <a:bodyPr/>
+            <a:lstStyle/>
+            <a:p>
+              <a:endParaRPr lang="en-PH"/>
+            </a:p>
+          </p:txBody>
         </p:sp>
       </p:grpSp>
       <p:pic>
@@ -4233,7 +4946,7 @@
 </p:sld>
 </file>
 
-<file path=ppt/slides/slide11.xml><?xml version="1.0" encoding="utf-8"?>
+<file path=ppt/slides/slide13.xml><?xml version="1.0" encoding="utf-8"?>
 <p:sld xmlns:a="http://schemas.openxmlformats.org/drawingml/2006/main" xmlns:r="http://schemas.openxmlformats.org/officeDocument/2006/relationships" xmlns:p="http://schemas.openxmlformats.org/presentationml/2006/main">
   <p:cSld>
     <p:bg>
@@ -4301,6 +5014,13 @@
             <a:tailEnd type="none" w="sm" len="sm"/>
           </a:ln>
         </p:spPr>
+        <p:txBody>
+          <a:bodyPr/>
+          <a:lstStyle/>
+          <a:p>
+            <a:endParaRPr lang="en-PH"/>
+          </a:p>
+        </p:txBody>
       </p:sp>
       <p:sp>
         <p:nvSpPr>
@@ -4325,6 +5045,13 @@
             <a:tailEnd type="none" w="sm" len="sm"/>
           </a:ln>
         </p:spPr>
+        <p:txBody>
+          <a:bodyPr/>
+          <a:lstStyle/>
+          <a:p>
+            <a:endParaRPr lang="en-PH"/>
+          </a:p>
+        </p:txBody>
       </p:sp>
       <p:sp>
         <p:nvSpPr>
@@ -4349,6 +5076,13 @@
             <a:tailEnd type="none" w="sm" len="sm"/>
           </a:ln>
         </p:spPr>
+        <p:txBody>
+          <a:bodyPr/>
+          <a:lstStyle/>
+          <a:p>
+            <a:endParaRPr lang="en-PH"/>
+          </a:p>
+        </p:txBody>
       </p:sp>
       <p:grpSp>
         <p:nvGrpSpPr>
@@ -4444,6 +5178,13 @@
                 <a:round/>
               </a:ln>
             </p:spPr>
+            <p:txBody>
+              <a:bodyPr/>
+              <a:lstStyle/>
+              <a:p>
+                <a:endParaRPr lang="en-PH"/>
+              </a:p>
+            </p:txBody>
           </p:sp>
           <p:sp>
             <p:nvSpPr>
@@ -4613,6 +5354,13 @@
                 <a:round/>
               </a:ln>
             </p:spPr>
+            <p:txBody>
+              <a:bodyPr/>
+              <a:lstStyle/>
+              <a:p>
+                <a:endParaRPr lang="en-PH"/>
+              </a:p>
+            </p:txBody>
           </p:sp>
           <p:sp>
             <p:nvSpPr>
@@ -4734,6 +5482,13 @@
                 <a:round/>
               </a:ln>
             </p:spPr>
+            <p:txBody>
+              <a:bodyPr/>
+              <a:lstStyle/>
+              <a:p>
+                <a:endParaRPr lang="en-PH"/>
+              </a:p>
+            </p:txBody>
           </p:sp>
           <p:sp>
             <p:nvSpPr>
@@ -5031,6 +5786,13 @@
                 <a:round/>
               </a:ln>
             </p:spPr>
+            <p:txBody>
+              <a:bodyPr/>
+              <a:lstStyle/>
+              <a:p>
+                <a:endParaRPr lang="en-PH"/>
+              </a:p>
+            </p:txBody>
           </p:sp>
           <p:sp>
             <p:nvSpPr>
@@ -5200,6 +5962,13 @@
                 <a:round/>
               </a:ln>
             </p:spPr>
+            <p:txBody>
+              <a:bodyPr/>
+              <a:lstStyle/>
+              <a:p>
+                <a:endParaRPr lang="en-PH"/>
+              </a:p>
+            </p:txBody>
           </p:sp>
           <p:sp>
             <p:nvSpPr>
@@ -5321,6 +6090,13 @@
                 <a:round/>
               </a:ln>
             </p:spPr>
+            <p:txBody>
+              <a:bodyPr/>
+              <a:lstStyle/>
+              <a:p>
+                <a:endParaRPr lang="en-PH"/>
+              </a:p>
+            </p:txBody>
           </p:sp>
           <p:sp>
             <p:nvSpPr>
@@ -5632,7 +6408,352 @@
 </p:sld>
 </file>
 
-<file path=ppt/slides/slide12.xml><?xml version="1.0" encoding="utf-8"?>
+<file path=ppt/slides/slide14.xml><?xml version="1.0" encoding="utf-8"?>
+<p:sld xmlns:a="http://schemas.openxmlformats.org/drawingml/2006/main" xmlns:r="http://schemas.openxmlformats.org/officeDocument/2006/relationships" xmlns:p="http://schemas.openxmlformats.org/presentationml/2006/main">
+  <p:cSld>
+    <p:bg>
+      <p:bgPr>
+        <a:gradFill rotWithShape="1">
+          <a:gsLst>
+            <a:gs pos="0">
+              <a:srgbClr val="6B1124">
+                <a:alpha val="100000"/>
+              </a:srgbClr>
+            </a:gs>
+            <a:gs pos="50000">
+              <a:srgbClr val="000000">
+                <a:alpha val="100000"/>
+              </a:srgbClr>
+            </a:gs>
+            <a:gs pos="100000">
+              <a:srgbClr val="6B1124">
+                <a:alpha val="100000"/>
+              </a:srgbClr>
+            </a:gs>
+          </a:gsLst>
+          <a:path path="circle">
+            <a:fillToRect r="100000" b="100000"/>
+          </a:path>
+          <a:tileRect l="-100000" t="-100000"/>
+        </a:gradFill>
+        <a:effectLst/>
+      </p:bgPr>
+    </p:bg>
+    <p:spTree>
+      <p:nvGrpSpPr>
+        <p:cNvPr id="1" name="">
+          <a:extLst>
+            <a:ext uri="{FF2B5EF4-FFF2-40B4-BE49-F238E27FC236}">
+              <a16:creationId xmlns:a16="http://schemas.microsoft.com/office/drawing/2014/main" id="{529AADCA-6FFC-0E90-023E-2683EA6F9E45}"/>
+            </a:ext>
+          </a:extLst>
+        </p:cNvPr>
+        <p:cNvGrpSpPr/>
+        <p:nvPr/>
+      </p:nvGrpSpPr>
+      <p:grpSpPr>
+        <a:xfrm>
+          <a:off x="0" y="0"/>
+          <a:ext cx="0" cy="0"/>
+          <a:chOff x="0" y="0"/>
+          <a:chExt cx="0" cy="0"/>
+        </a:xfrm>
+      </p:grpSpPr>
+      <p:sp>
+        <p:nvSpPr>
+          <p:cNvPr id="9" name="TextBox 8">
+            <a:extLst>
+              <a:ext uri="{FF2B5EF4-FFF2-40B4-BE49-F238E27FC236}">
+                <a16:creationId xmlns:a16="http://schemas.microsoft.com/office/drawing/2014/main" id="{B75BF322-C8B9-DCB0-1A6B-72925003A503}"/>
+              </a:ext>
+            </a:extLst>
+          </p:cNvPr>
+          <p:cNvSpPr txBox="1"/>
+          <p:nvPr/>
+        </p:nvSpPr>
+        <p:spPr>
+          <a:xfrm>
+            <a:off x="1524000" y="1257300"/>
+            <a:ext cx="6967016" cy="551959"/>
+          </a:xfrm>
+          <a:prstGeom prst="rect">
+            <a:avLst/>
+          </a:prstGeom>
+        </p:spPr>
+        <p:txBody>
+          <a:bodyPr lIns="0" tIns="0" rIns="0" bIns="0" rtlCol="0" anchor="t">
+            <a:spAutoFit/>
+          </a:bodyPr>
+          <a:lstStyle/>
+          <a:p>
+            <a:pPr marL="0" lvl="0" indent="0" algn="l">
+              <a:lnSpc>
+                <a:spcPts val="4227"/>
+              </a:lnSpc>
+              <a:spcBef>
+                <a:spcPct val="0"/>
+              </a:spcBef>
+            </a:pPr>
+            <a:r>
+              <a:rPr lang="en-US" sz="4000" spc="-126" dirty="0">
+                <a:solidFill>
+                  <a:srgbClr val="F4F4F4"/>
+                </a:solidFill>
+                <a:latin typeface="Poppins"/>
+                <a:ea typeface="Poppins"/>
+                <a:cs typeface="Poppins"/>
+                <a:sym typeface="Poppins"/>
+              </a:rPr>
+              <a:t>Recommendations</a:t>
+            </a:r>
+          </a:p>
+        </p:txBody>
+      </p:sp>
+      <p:sp>
+        <p:nvSpPr>
+          <p:cNvPr id="13" name="TextBox 12">
+            <a:extLst>
+              <a:ext uri="{FF2B5EF4-FFF2-40B4-BE49-F238E27FC236}">
+                <a16:creationId xmlns:a16="http://schemas.microsoft.com/office/drawing/2014/main" id="{E80C019A-A4E1-5341-C950-220FF23A5997}"/>
+              </a:ext>
+            </a:extLst>
+          </p:cNvPr>
+          <p:cNvSpPr txBox="1"/>
+          <p:nvPr/>
+        </p:nvSpPr>
+        <p:spPr>
+          <a:xfrm>
+            <a:off x="2209800" y="2781300"/>
+            <a:ext cx="13601700" cy="4785926"/>
+          </a:xfrm>
+          <a:prstGeom prst="rect">
+            <a:avLst/>
+          </a:prstGeom>
+          <a:noFill/>
+        </p:spPr>
+        <p:txBody>
+          <a:bodyPr wrap="square" rtlCol="0">
+            <a:spAutoFit/>
+          </a:bodyPr>
+          <a:lstStyle/>
+          <a:p>
+            <a:pPr lvl="0" fontAlgn="base"/>
+            <a:r>
+              <a:rPr lang="en-PH" sz="2500" b="1" dirty="0">
+                <a:solidFill>
+                  <a:schemeClr val="bg1"/>
+                </a:solidFill>
+                <a:latin typeface="Inter Extra-Light" panose="020B0604020202020204" charset="0"/>
+                <a:ea typeface="Inter Extra-Light" panose="020B0604020202020204" charset="0"/>
+              </a:rPr>
+              <a:t>Immediate Priorities</a:t>
+            </a:r>
+          </a:p>
+          <a:p>
+            <a:pPr marL="342900" lvl="0" indent="-342900" fontAlgn="base">
+              <a:buFont typeface="Arial" panose="020B0604020202020204" pitchFamily="34" charset="0"/>
+              <a:buChar char="•"/>
+            </a:pPr>
+            <a:r>
+              <a:rPr lang="en-PH" sz="2000" dirty="0">
+                <a:solidFill>
+                  <a:schemeClr val="bg1"/>
+                </a:solidFill>
+                <a:latin typeface="Inter Extra-Light" panose="020B0604020202020204" charset="0"/>
+                <a:ea typeface="Inter Extra-Light" panose="020B0604020202020204" charset="0"/>
+              </a:rPr>
+              <a:t>Address value for money and ground service issues</a:t>
+            </a:r>
+          </a:p>
+          <a:p>
+            <a:pPr marL="342900" lvl="0" indent="-342900" fontAlgn="base">
+              <a:buFont typeface="Arial" panose="020B0604020202020204" pitchFamily="34" charset="0"/>
+              <a:buChar char="•"/>
+            </a:pPr>
+            <a:r>
+              <a:rPr lang="en-PH" sz="2000" dirty="0">
+                <a:solidFill>
+                  <a:schemeClr val="bg1"/>
+                </a:solidFill>
+                <a:latin typeface="Inter Extra-Light" panose="020B0604020202020204" charset="0"/>
+                <a:ea typeface="Inter Extra-Light" panose="020B0604020202020204" charset="0"/>
+              </a:rPr>
+              <a:t>Improve Wi-Fi and entertainment offerings</a:t>
+            </a:r>
+          </a:p>
+          <a:p>
+            <a:pPr marL="342900" lvl="0" indent="-342900" fontAlgn="base">
+              <a:buFont typeface="Arial" panose="020B0604020202020204" pitchFamily="34" charset="0"/>
+              <a:buChar char="•"/>
+            </a:pPr>
+            <a:r>
+              <a:rPr lang="en-PH" sz="2000" dirty="0">
+                <a:solidFill>
+                  <a:schemeClr val="bg1"/>
+                </a:solidFill>
+                <a:latin typeface="Inter Extra-Light" panose="020B0604020202020204" charset="0"/>
+                <a:ea typeface="Inter Extra-Light" panose="020B0604020202020204" charset="0"/>
+              </a:rPr>
+              <a:t>Enhance food and beverage quality</a:t>
+            </a:r>
+          </a:p>
+          <a:p>
+            <a:pPr lvl="0" fontAlgn="base"/>
+            <a:endParaRPr lang="en-PH" sz="2500" b="1" dirty="0">
+              <a:solidFill>
+                <a:schemeClr val="bg1"/>
+              </a:solidFill>
+              <a:latin typeface="Inter Extra-Light" panose="020B0604020202020204" charset="0"/>
+              <a:ea typeface="Inter Extra-Light" panose="020B0604020202020204" charset="0"/>
+            </a:endParaRPr>
+          </a:p>
+          <a:p>
+            <a:pPr lvl="0" fontAlgn="base"/>
+            <a:r>
+              <a:rPr lang="en-PH" sz="2500" b="1" dirty="0">
+                <a:solidFill>
+                  <a:schemeClr val="bg1"/>
+                </a:solidFill>
+                <a:latin typeface="Inter Extra-Light" panose="020B0604020202020204" charset="0"/>
+                <a:ea typeface="Inter Extra-Light" panose="020B0604020202020204" charset="0"/>
+              </a:rPr>
+              <a:t>Strategic Focus</a:t>
+            </a:r>
+          </a:p>
+          <a:p>
+            <a:pPr marL="342900" lvl="0" indent="-342900" fontAlgn="base">
+              <a:buFont typeface="Arial" panose="020B0604020202020204" pitchFamily="34" charset="0"/>
+              <a:buChar char="•"/>
+            </a:pPr>
+            <a:r>
+              <a:rPr lang="en-PH" sz="2000" dirty="0">
+                <a:solidFill>
+                  <a:schemeClr val="bg1"/>
+                </a:solidFill>
+                <a:latin typeface="Inter Extra-Light" panose="020B0604020202020204" charset="0"/>
+                <a:ea typeface="Inter Extra-Light" panose="020B0604020202020204" charset="0"/>
+              </a:rPr>
+              <a:t>Leverage cabin staff excellence as a competitive advantage</a:t>
+            </a:r>
+          </a:p>
+          <a:p>
+            <a:pPr marL="342900" lvl="0" indent="-342900" fontAlgn="base">
+              <a:buFont typeface="Arial" panose="020B0604020202020204" pitchFamily="34" charset="0"/>
+              <a:buChar char="•"/>
+            </a:pPr>
+            <a:r>
+              <a:rPr lang="en-PH" sz="2000" dirty="0">
+                <a:solidFill>
+                  <a:schemeClr val="bg1"/>
+                </a:solidFill>
+                <a:latin typeface="Inter Extra-Light" panose="020B0604020202020204" charset="0"/>
+                <a:ea typeface="Inter Extra-Light" panose="020B0604020202020204" charset="0"/>
+              </a:rPr>
+              <a:t>Maintain seat comfort standards across fleet</a:t>
+            </a:r>
+          </a:p>
+          <a:p>
+            <a:pPr marL="342900" lvl="0" indent="-342900" fontAlgn="base">
+              <a:buFont typeface="Arial" panose="020B0604020202020204" pitchFamily="34" charset="0"/>
+              <a:buChar char="•"/>
+            </a:pPr>
+            <a:r>
+              <a:rPr lang="en-PH" sz="2000" dirty="0">
+                <a:solidFill>
+                  <a:schemeClr val="bg1"/>
+                </a:solidFill>
+                <a:latin typeface="Inter Extra-Light" panose="020B0604020202020204" charset="0"/>
+                <a:ea typeface="Inter Extra-Light" panose="020B0604020202020204" charset="0"/>
+              </a:rPr>
+              <a:t>Tailor improvements by passenger segment and route</a:t>
+            </a:r>
+          </a:p>
+          <a:p>
+            <a:pPr lvl="0" fontAlgn="base"/>
+            <a:br>
+              <a:rPr lang="en-PH" sz="2500" b="1" dirty="0">
+                <a:solidFill>
+                  <a:schemeClr val="bg1"/>
+                </a:solidFill>
+                <a:latin typeface="Inter Extra-Light" panose="020B0604020202020204" charset="0"/>
+                <a:ea typeface="Inter Extra-Light" panose="020B0604020202020204" charset="0"/>
+              </a:rPr>
+            </a:br>
+            <a:r>
+              <a:rPr lang="en-PH" sz="2500" b="1" dirty="0">
+                <a:solidFill>
+                  <a:schemeClr val="bg1"/>
+                </a:solidFill>
+                <a:latin typeface="Inter Extra-Light" panose="020B0604020202020204" charset="0"/>
+                <a:ea typeface="Inter Extra-Light" panose="020B0604020202020204" charset="0"/>
+              </a:rPr>
+              <a:t>Measuring Success</a:t>
+            </a:r>
+          </a:p>
+          <a:p>
+            <a:pPr marL="342900" lvl="0" indent="-342900" fontAlgn="base">
+              <a:buFont typeface="Arial" panose="020B0604020202020204" pitchFamily="34" charset="0"/>
+              <a:buChar char="•"/>
+            </a:pPr>
+            <a:r>
+              <a:rPr lang="en-PH" sz="2000" dirty="0">
+                <a:solidFill>
+                  <a:schemeClr val="bg1"/>
+                </a:solidFill>
+                <a:latin typeface="Inter Extra-Light" panose="020B0604020202020204" charset="0"/>
+                <a:ea typeface="Inter Extra-Light" panose="020B0604020202020204" charset="0"/>
+              </a:rPr>
+              <a:t>Track recommendation rates over time</a:t>
+            </a:r>
+          </a:p>
+          <a:p>
+            <a:pPr marL="342900" lvl="0" indent="-342900" fontAlgn="base">
+              <a:buFont typeface="Arial" panose="020B0604020202020204" pitchFamily="34" charset="0"/>
+              <a:buChar char="•"/>
+            </a:pPr>
+            <a:r>
+              <a:rPr lang="en-PH" sz="2000" dirty="0">
+                <a:solidFill>
+                  <a:schemeClr val="bg1"/>
+                </a:solidFill>
+                <a:latin typeface="Inter Extra-Light" panose="020B0604020202020204" charset="0"/>
+                <a:ea typeface="Inter Extra-Light" panose="020B0604020202020204" charset="0"/>
+              </a:rPr>
+              <a:t>Monitor ratings in targeted improvement areas</a:t>
+            </a:r>
+          </a:p>
+          <a:p>
+            <a:pPr marL="342900" lvl="0" indent="-342900" fontAlgn="base">
+              <a:buFont typeface="Arial" panose="020B0604020202020204" pitchFamily="34" charset="0"/>
+              <a:buChar char="•"/>
+            </a:pPr>
+            <a:r>
+              <a:rPr lang="en-PH" sz="2000" dirty="0">
+                <a:solidFill>
+                  <a:schemeClr val="bg1"/>
+                </a:solidFill>
+                <a:latin typeface="Inter Extra-Light" panose="020B0604020202020204" charset="0"/>
+                <a:ea typeface="Inter Extra-Light" panose="020B0604020202020204" charset="0"/>
+              </a:rPr>
+              <a:t>Compare performance across key routes</a:t>
+            </a:r>
+          </a:p>
+        </p:txBody>
+      </p:sp>
+    </p:spTree>
+    <p:extLst>
+      <p:ext uri="{BB962C8B-B14F-4D97-AF65-F5344CB8AC3E}">
+        <p14:creationId xmlns:p14="http://schemas.microsoft.com/office/powerpoint/2010/main" val="3952301158"/>
+      </p:ext>
+    </p:extLst>
+  </p:cSld>
+  <p:clrMapOvr>
+    <a:masterClrMapping/>
+  </p:clrMapOvr>
+</p:sld>
+</file>
+
+<file path=ppt/slides/slide15.xml><?xml version="1.0" encoding="utf-8"?>
 <p:sld xmlns:a="http://schemas.openxmlformats.org/drawingml/2006/main" xmlns:r="http://schemas.openxmlformats.org/officeDocument/2006/relationships" xmlns:p="http://schemas.openxmlformats.org/presentationml/2006/main">
   <p:cSld>
     <p:bg>
@@ -5700,6 +6821,13 @@
             <a:tailEnd type="none" w="sm" len="sm"/>
           </a:ln>
         </p:spPr>
+        <p:txBody>
+          <a:bodyPr/>
+          <a:lstStyle/>
+          <a:p>
+            <a:endParaRPr lang="en-PH"/>
+          </a:p>
+        </p:txBody>
       </p:sp>
       <p:sp>
         <p:nvSpPr>
@@ -5724,6 +6852,13 @@
             <a:tailEnd type="none" w="sm" len="sm"/>
           </a:ln>
         </p:spPr>
+        <p:txBody>
+          <a:bodyPr/>
+          <a:lstStyle/>
+          <a:p>
+            <a:endParaRPr lang="en-PH"/>
+          </a:p>
+        </p:txBody>
       </p:sp>
       <p:grpSp>
         <p:nvGrpSpPr>
@@ -5820,6 +6955,13 @@
               <a:round/>
             </a:ln>
           </p:spPr>
+          <p:txBody>
+            <a:bodyPr/>
+            <a:lstStyle/>
+            <a:p>
+              <a:endParaRPr lang="en-PH"/>
+            </a:p>
+          </p:txBody>
         </p:sp>
         <p:sp>
           <p:nvSpPr>
@@ -5956,6 +7098,13 @@
               <a:round/>
             </a:ln>
           </p:spPr>
+          <p:txBody>
+            <a:bodyPr/>
+            <a:lstStyle/>
+            <a:p>
+              <a:endParaRPr lang="en-PH"/>
+            </a:p>
+          </p:txBody>
         </p:sp>
         <p:sp>
           <p:nvSpPr>
@@ -6097,6 +7246,13 @@
               <a:round/>
             </a:ln>
           </p:spPr>
+          <p:txBody>
+            <a:bodyPr/>
+            <a:lstStyle/>
+            <a:p>
+              <a:endParaRPr lang="en-PH"/>
+            </a:p>
+          </p:txBody>
         </p:sp>
         <p:sp>
           <p:nvSpPr>
@@ -6233,6 +7389,13 @@
               <a:round/>
             </a:ln>
           </p:spPr>
+          <p:txBody>
+            <a:bodyPr/>
+            <a:lstStyle/>
+            <a:p>
+              <a:endParaRPr lang="en-PH"/>
+            </a:p>
+          </p:txBody>
         </p:sp>
         <p:sp>
           <p:nvSpPr>
@@ -6369,6 +7532,13 @@
               <a:round/>
             </a:ln>
           </p:spPr>
+          <p:txBody>
+            <a:bodyPr/>
+            <a:lstStyle/>
+            <a:p>
+              <a:endParaRPr lang="en-PH"/>
+            </a:p>
+          </p:txBody>
         </p:sp>
         <p:sp>
           <p:nvSpPr>
@@ -6501,6 +7671,13 @@
               <a:miter/>
             </a:ln>
           </p:spPr>
+          <p:txBody>
+            <a:bodyPr/>
+            <a:lstStyle/>
+            <a:p>
+              <a:endParaRPr lang="en-PH"/>
+            </a:p>
+          </p:txBody>
         </p:sp>
         <p:sp>
           <p:nvSpPr>
@@ -6633,6 +7810,13 @@
               <a:miter/>
             </a:ln>
           </p:spPr>
+          <p:txBody>
+            <a:bodyPr/>
+            <a:lstStyle/>
+            <a:p>
+              <a:endParaRPr lang="en-PH"/>
+            </a:p>
+          </p:txBody>
         </p:sp>
         <p:sp>
           <p:nvSpPr>
@@ -6765,6 +7949,13 @@
               <a:miter/>
             </a:ln>
           </p:spPr>
+          <p:txBody>
+            <a:bodyPr/>
+            <a:lstStyle/>
+            <a:p>
+              <a:endParaRPr lang="en-PH"/>
+            </a:p>
+          </p:txBody>
         </p:sp>
         <p:sp>
           <p:nvSpPr>
@@ -6897,6 +8088,13 @@
               <a:miter/>
             </a:ln>
           </p:spPr>
+          <p:txBody>
+            <a:bodyPr/>
+            <a:lstStyle/>
+            <a:p>
+              <a:endParaRPr lang="en-PH"/>
+            </a:p>
+          </p:txBody>
         </p:sp>
         <p:sp>
           <p:nvSpPr>
@@ -7029,6 +8227,13 @@
               <a:miter/>
             </a:ln>
           </p:spPr>
+          <p:txBody>
+            <a:bodyPr/>
+            <a:lstStyle/>
+            <a:p>
+              <a:endParaRPr lang="en-PH"/>
+            </a:p>
+          </p:txBody>
         </p:sp>
         <p:sp>
           <p:nvSpPr>
@@ -7111,7 +8316,7 @@
                 </a:lnSpc>
               </a:pPr>
               <a:r>
-                <a:rPr lang="en-US" sz="8550" b="1" spc="-359">
+                <a:rPr lang="en-US" sz="8550" b="1" spc="-359" dirty="0">
                   <a:solidFill>
                     <a:srgbClr val="F4F4F4"/>
                   </a:solidFill>
@@ -7222,7 +8427,7 @@
 </p:sld>
 </file>
 
-<file path=ppt/slides/slide13.xml><?xml version="1.0" encoding="utf-8"?>
+<file path=ppt/slides/slide16.xml><?xml version="1.0" encoding="utf-8"?>
 <p:sld xmlns:a="http://schemas.openxmlformats.org/drawingml/2006/main" xmlns:r="http://schemas.openxmlformats.org/officeDocument/2006/relationships" xmlns:p="http://schemas.openxmlformats.org/presentationml/2006/main">
   <p:cSld>
     <p:bg>
@@ -7302,6 +8507,13 @@
             <a:tailEnd type="none" w="sm" len="sm"/>
           </a:ln>
         </p:spPr>
+        <p:txBody>
+          <a:bodyPr/>
+          <a:lstStyle/>
+          <a:p>
+            <a:endParaRPr lang="en-PH"/>
+          </a:p>
+        </p:txBody>
       </p:sp>
       <p:grpSp>
         <p:nvGrpSpPr>
@@ -7410,6 +8622,13 @@
               <a:round/>
             </a:ln>
           </p:spPr>
+          <p:txBody>
+            <a:bodyPr/>
+            <a:lstStyle/>
+            <a:p>
+              <a:endParaRPr lang="en-PH"/>
+            </a:p>
+          </p:txBody>
         </p:sp>
         <p:sp>
           <p:nvSpPr>
@@ -7560,6 +8779,13 @@
               <a:miter/>
             </a:ln>
           </p:spPr>
+          <p:txBody>
+            <a:bodyPr/>
+            <a:lstStyle/>
+            <a:p>
+              <a:endParaRPr lang="en-PH"/>
+            </a:p>
+          </p:txBody>
         </p:sp>
         <p:sp>
           <p:nvSpPr>
@@ -7710,6 +8936,13 @@
               <a:miter/>
             </a:ln>
           </p:spPr>
+          <p:txBody>
+            <a:bodyPr/>
+            <a:lstStyle/>
+            <a:p>
+              <a:endParaRPr lang="en-PH"/>
+            </a:p>
+          </p:txBody>
         </p:sp>
         <p:sp>
           <p:nvSpPr>
@@ -7860,6 +9093,13 @@
               <a:miter/>
             </a:ln>
           </p:spPr>
+          <p:txBody>
+            <a:bodyPr/>
+            <a:lstStyle/>
+            <a:p>
+              <a:endParaRPr lang="en-PH"/>
+            </a:p>
+          </p:txBody>
         </p:sp>
         <p:sp>
           <p:nvSpPr>
@@ -8010,6 +9250,13 @@
               <a:miter/>
             </a:ln>
           </p:spPr>
+          <p:txBody>
+            <a:bodyPr/>
+            <a:lstStyle/>
+            <a:p>
+              <a:endParaRPr lang="en-PH"/>
+            </a:p>
+          </p:txBody>
         </p:sp>
         <p:sp>
           <p:nvSpPr>
@@ -8160,6 +9407,13 @@
               <a:miter/>
             </a:ln>
           </p:spPr>
+          <p:txBody>
+            <a:bodyPr/>
+            <a:lstStyle/>
+            <a:p>
+              <a:endParaRPr lang="en-PH"/>
+            </a:p>
+          </p:txBody>
         </p:sp>
         <p:sp>
           <p:nvSpPr>
@@ -8250,7 +9504,7 @@
 </p:sld>
 </file>
 
-<file path=ppt/slides/slide14.xml><?xml version="1.0" encoding="utf-8"?>
+<file path=ppt/slides/slide17.xml><?xml version="1.0" encoding="utf-8"?>
 <p:sld xmlns:a="http://schemas.openxmlformats.org/drawingml/2006/main" xmlns:r="http://schemas.openxmlformats.org/officeDocument/2006/relationships" xmlns:p="http://schemas.openxmlformats.org/presentationml/2006/main">
   <p:cSld>
     <p:bg>
@@ -8330,6 +9584,13 @@
             <a:tailEnd type="none" w="sm" len="sm"/>
           </a:ln>
         </p:spPr>
+        <p:txBody>
+          <a:bodyPr/>
+          <a:lstStyle/>
+          <a:p>
+            <a:endParaRPr lang="en-PH"/>
+          </a:p>
+        </p:txBody>
       </p:sp>
       <p:grpSp>
         <p:nvGrpSpPr>
@@ -8438,6 +9699,13 @@
               <a:round/>
             </a:ln>
           </p:spPr>
+          <p:txBody>
+            <a:bodyPr/>
+            <a:lstStyle/>
+            <a:p>
+              <a:endParaRPr lang="en-PH"/>
+            </a:p>
+          </p:txBody>
         </p:sp>
         <p:sp>
           <p:nvSpPr>
@@ -8592,6 +9860,13 @@
               <a:round/>
             </a:ln>
           </p:spPr>
+          <p:txBody>
+            <a:bodyPr/>
+            <a:lstStyle/>
+            <a:p>
+              <a:endParaRPr lang="en-PH"/>
+            </a:p>
+          </p:txBody>
         </p:sp>
         <p:sp>
           <p:nvSpPr>
@@ -8742,6 +10017,13 @@
               <a:miter/>
             </a:ln>
           </p:spPr>
+          <p:txBody>
+            <a:bodyPr/>
+            <a:lstStyle/>
+            <a:p>
+              <a:endParaRPr lang="en-PH"/>
+            </a:p>
+          </p:txBody>
         </p:sp>
         <p:sp>
           <p:nvSpPr>
@@ -8892,6 +10174,13 @@
               <a:miter/>
             </a:ln>
           </p:spPr>
+          <p:txBody>
+            <a:bodyPr/>
+            <a:lstStyle/>
+            <a:p>
+              <a:endParaRPr lang="en-PH"/>
+            </a:p>
+          </p:txBody>
         </p:sp>
         <p:sp>
           <p:nvSpPr>
@@ -9042,6 +10331,13 @@
               <a:miter/>
             </a:ln>
           </p:spPr>
+          <p:txBody>
+            <a:bodyPr/>
+            <a:lstStyle/>
+            <a:p>
+              <a:endParaRPr lang="en-PH"/>
+            </a:p>
+          </p:txBody>
         </p:sp>
         <p:sp>
           <p:nvSpPr>
@@ -9192,6 +10488,13 @@
               <a:miter/>
             </a:ln>
           </p:spPr>
+          <p:txBody>
+            <a:bodyPr/>
+            <a:lstStyle/>
+            <a:p>
+              <a:endParaRPr lang="en-PH"/>
+            </a:p>
+          </p:txBody>
         </p:sp>
         <p:sp>
           <p:nvSpPr>
@@ -9342,6 +10645,13 @@
               <a:miter/>
             </a:ln>
           </p:spPr>
+          <p:txBody>
+            <a:bodyPr/>
+            <a:lstStyle/>
+            <a:p>
+              <a:endParaRPr lang="en-PH"/>
+            </a:p>
+          </p:txBody>
         </p:sp>
         <p:sp>
           <p:nvSpPr>
@@ -9432,7 +10742,7 @@
 </p:sld>
 </file>
 
-<file path=ppt/slides/slide15.xml><?xml version="1.0" encoding="utf-8"?>
+<file path=ppt/slides/slide18.xml><?xml version="1.0" encoding="utf-8"?>
 <p:sld xmlns:a="http://schemas.openxmlformats.org/drawingml/2006/main" xmlns:r="http://schemas.openxmlformats.org/officeDocument/2006/relationships" xmlns:p="http://schemas.openxmlformats.org/presentationml/2006/main">
   <p:cSld>
     <p:bg>
@@ -9512,6 +10822,13 @@
             <a:tailEnd type="none" w="sm" len="sm"/>
           </a:ln>
         </p:spPr>
+        <p:txBody>
+          <a:bodyPr/>
+          <a:lstStyle/>
+          <a:p>
+            <a:endParaRPr lang="en-PH"/>
+          </a:p>
+        </p:txBody>
       </p:sp>
       <p:grpSp>
         <p:nvGrpSpPr>
@@ -9620,6 +10937,13 @@
               <a:round/>
             </a:ln>
           </p:spPr>
+          <p:txBody>
+            <a:bodyPr/>
+            <a:lstStyle/>
+            <a:p>
+              <a:endParaRPr lang="en-PH"/>
+            </a:p>
+          </p:txBody>
         </p:sp>
         <p:sp>
           <p:nvSpPr>
@@ -9774,6 +11098,13 @@
               <a:round/>
             </a:ln>
           </p:spPr>
+          <p:txBody>
+            <a:bodyPr/>
+            <a:lstStyle/>
+            <a:p>
+              <a:endParaRPr lang="en-PH"/>
+            </a:p>
+          </p:txBody>
         </p:sp>
         <p:sp>
           <p:nvSpPr>
@@ -9933,6 +11264,13 @@
               <a:round/>
             </a:ln>
           </p:spPr>
+          <p:txBody>
+            <a:bodyPr/>
+            <a:lstStyle/>
+            <a:p>
+              <a:endParaRPr lang="en-PH"/>
+            </a:p>
+          </p:txBody>
         </p:sp>
         <p:sp>
           <p:nvSpPr>
@@ -10083,6 +11421,13 @@
               <a:miter/>
             </a:ln>
           </p:spPr>
+          <p:txBody>
+            <a:bodyPr/>
+            <a:lstStyle/>
+            <a:p>
+              <a:endParaRPr lang="en-PH"/>
+            </a:p>
+          </p:txBody>
         </p:sp>
         <p:sp>
           <p:nvSpPr>
@@ -10233,6 +11578,13 @@
               <a:miter/>
             </a:ln>
           </p:spPr>
+          <p:txBody>
+            <a:bodyPr/>
+            <a:lstStyle/>
+            <a:p>
+              <a:endParaRPr lang="en-PH"/>
+            </a:p>
+          </p:txBody>
         </p:sp>
         <p:sp>
           <p:nvSpPr>
@@ -10383,6 +11735,13 @@
               <a:miter/>
             </a:ln>
           </p:spPr>
+          <p:txBody>
+            <a:bodyPr/>
+            <a:lstStyle/>
+            <a:p>
+              <a:endParaRPr lang="en-PH"/>
+            </a:p>
+          </p:txBody>
         </p:sp>
         <p:sp>
           <p:nvSpPr>
@@ -10533,6 +11892,13 @@
               <a:miter/>
             </a:ln>
           </p:spPr>
+          <p:txBody>
+            <a:bodyPr/>
+            <a:lstStyle/>
+            <a:p>
+              <a:endParaRPr lang="en-PH"/>
+            </a:p>
+          </p:txBody>
         </p:sp>
         <p:sp>
           <p:nvSpPr>
@@ -10683,6 +12049,13 @@
               <a:miter/>
             </a:ln>
           </p:spPr>
+          <p:txBody>
+            <a:bodyPr/>
+            <a:lstStyle/>
+            <a:p>
+              <a:endParaRPr lang="en-PH"/>
+            </a:p>
+          </p:txBody>
         </p:sp>
         <p:sp>
           <p:nvSpPr>
@@ -10773,7 +12146,7 @@
 </p:sld>
 </file>
 
-<file path=ppt/slides/slide16.xml><?xml version="1.0" encoding="utf-8"?>
+<file path=ppt/slides/slide19.xml><?xml version="1.0" encoding="utf-8"?>
 <p:sld xmlns:a="http://schemas.openxmlformats.org/drawingml/2006/main" xmlns:r="http://schemas.openxmlformats.org/officeDocument/2006/relationships" xmlns:p="http://schemas.openxmlformats.org/presentationml/2006/main">
   <p:cSld>
     <p:bg>
@@ -10853,6 +12226,13 @@
             <a:tailEnd type="none" w="sm" len="sm"/>
           </a:ln>
         </p:spPr>
+        <p:txBody>
+          <a:bodyPr/>
+          <a:lstStyle/>
+          <a:p>
+            <a:endParaRPr lang="en-PH"/>
+          </a:p>
+        </p:txBody>
       </p:sp>
       <p:grpSp>
         <p:nvGrpSpPr>
@@ -10961,6 +12341,13 @@
               <a:round/>
             </a:ln>
           </p:spPr>
+          <p:txBody>
+            <a:bodyPr/>
+            <a:lstStyle/>
+            <a:p>
+              <a:endParaRPr lang="en-PH"/>
+            </a:p>
+          </p:txBody>
         </p:sp>
         <p:sp>
           <p:nvSpPr>
@@ -11115,6 +12502,13 @@
               <a:round/>
             </a:ln>
           </p:spPr>
+          <p:txBody>
+            <a:bodyPr/>
+            <a:lstStyle/>
+            <a:p>
+              <a:endParaRPr lang="en-PH"/>
+            </a:p>
+          </p:txBody>
         </p:sp>
         <p:sp>
           <p:nvSpPr>
@@ -11274,6 +12668,13 @@
               <a:round/>
             </a:ln>
           </p:spPr>
+          <p:txBody>
+            <a:bodyPr/>
+            <a:lstStyle/>
+            <a:p>
+              <a:endParaRPr lang="en-PH"/>
+            </a:p>
+          </p:txBody>
         </p:sp>
         <p:sp>
           <p:nvSpPr>
@@ -11428,6 +12829,13 @@
               <a:round/>
             </a:ln>
           </p:spPr>
+          <p:txBody>
+            <a:bodyPr/>
+            <a:lstStyle/>
+            <a:p>
+              <a:endParaRPr lang="en-PH"/>
+            </a:p>
+          </p:txBody>
         </p:sp>
         <p:sp>
           <p:nvSpPr>
@@ -11578,6 +12986,13 @@
               <a:miter/>
             </a:ln>
           </p:spPr>
+          <p:txBody>
+            <a:bodyPr/>
+            <a:lstStyle/>
+            <a:p>
+              <a:endParaRPr lang="en-PH"/>
+            </a:p>
+          </p:txBody>
         </p:sp>
         <p:sp>
           <p:nvSpPr>
@@ -11728,6 +13143,13 @@
               <a:miter/>
             </a:ln>
           </p:spPr>
+          <p:txBody>
+            <a:bodyPr/>
+            <a:lstStyle/>
+            <a:p>
+              <a:endParaRPr lang="en-PH"/>
+            </a:p>
+          </p:txBody>
         </p:sp>
         <p:sp>
           <p:nvSpPr>
@@ -11878,6 +13300,13 @@
               <a:miter/>
             </a:ln>
           </p:spPr>
+          <p:txBody>
+            <a:bodyPr/>
+            <a:lstStyle/>
+            <a:p>
+              <a:endParaRPr lang="en-PH"/>
+            </a:p>
+          </p:txBody>
         </p:sp>
         <p:sp>
           <p:nvSpPr>
@@ -12028,6 +13457,13 @@
               <a:miter/>
             </a:ln>
           </p:spPr>
+          <p:txBody>
+            <a:bodyPr/>
+            <a:lstStyle/>
+            <a:p>
+              <a:endParaRPr lang="en-PH"/>
+            </a:p>
+          </p:txBody>
         </p:sp>
         <p:sp>
           <p:nvSpPr>
@@ -12178,6 +13614,13 @@
               <a:miter/>
             </a:ln>
           </p:spPr>
+          <p:txBody>
+            <a:bodyPr/>
+            <a:lstStyle/>
+            <a:p>
+              <a:endParaRPr lang="en-PH"/>
+            </a:p>
+          </p:txBody>
         </p:sp>
         <p:sp>
           <p:nvSpPr>
@@ -12268,7 +13711,192 @@
 </p:sld>
 </file>
 
-<file path=ppt/slides/slide17.xml><?xml version="1.0" encoding="utf-8"?>
+<file path=ppt/slides/slide2.xml><?xml version="1.0" encoding="utf-8"?>
+<p:sld xmlns:a="http://schemas.openxmlformats.org/drawingml/2006/main" xmlns:r="http://schemas.openxmlformats.org/officeDocument/2006/relationships" xmlns:p="http://schemas.openxmlformats.org/presentationml/2006/main">
+  <p:cSld>
+    <p:bg>
+      <p:bgPr>
+        <a:gradFill rotWithShape="1">
+          <a:gsLst>
+            <a:gs pos="0">
+              <a:srgbClr val="6B1124">
+                <a:alpha val="100000"/>
+              </a:srgbClr>
+            </a:gs>
+            <a:gs pos="50000">
+              <a:srgbClr val="000000">
+                <a:alpha val="100000"/>
+              </a:srgbClr>
+            </a:gs>
+            <a:gs pos="100000">
+              <a:srgbClr val="6B1124">
+                <a:alpha val="100000"/>
+              </a:srgbClr>
+            </a:gs>
+          </a:gsLst>
+          <a:path path="circle">
+            <a:fillToRect r="100000" b="100000"/>
+          </a:path>
+          <a:tileRect l="-100000" t="-100000"/>
+        </a:gradFill>
+        <a:effectLst/>
+      </p:bgPr>
+    </p:bg>
+    <p:spTree>
+      <p:nvGrpSpPr>
+        <p:cNvPr id="1" name="">
+          <a:extLst>
+            <a:ext uri="{FF2B5EF4-FFF2-40B4-BE49-F238E27FC236}">
+              <a16:creationId xmlns:a16="http://schemas.microsoft.com/office/drawing/2014/main" id="{09BC29A0-CB03-217E-DFDB-B2E3193C3827}"/>
+            </a:ext>
+          </a:extLst>
+        </p:cNvPr>
+        <p:cNvGrpSpPr/>
+        <p:nvPr/>
+      </p:nvGrpSpPr>
+      <p:grpSpPr>
+        <a:xfrm>
+          <a:off x="0" y="0"/>
+          <a:ext cx="0" cy="0"/>
+          <a:chOff x="0" y="0"/>
+          <a:chExt cx="0" cy="0"/>
+        </a:xfrm>
+      </p:grpSpPr>
+      <p:sp>
+        <p:nvSpPr>
+          <p:cNvPr id="9" name="TextBox 8">
+            <a:extLst>
+              <a:ext uri="{FF2B5EF4-FFF2-40B4-BE49-F238E27FC236}">
+                <a16:creationId xmlns:a16="http://schemas.microsoft.com/office/drawing/2014/main" id="{110B670E-29EB-86C9-AB19-80B682E8F6A1}"/>
+              </a:ext>
+            </a:extLst>
+          </p:cNvPr>
+          <p:cNvSpPr txBox="1"/>
+          <p:nvPr/>
+        </p:nvSpPr>
+        <p:spPr>
+          <a:xfrm>
+            <a:off x="1371600" y="1790700"/>
+            <a:ext cx="6967016" cy="551959"/>
+          </a:xfrm>
+          <a:prstGeom prst="rect">
+            <a:avLst/>
+          </a:prstGeom>
+        </p:spPr>
+        <p:txBody>
+          <a:bodyPr lIns="0" tIns="0" rIns="0" bIns="0" rtlCol="0" anchor="t">
+            <a:spAutoFit/>
+          </a:bodyPr>
+          <a:lstStyle/>
+          <a:p>
+            <a:pPr marL="0" lvl="0" indent="0" algn="l">
+              <a:lnSpc>
+                <a:spcPts val="4227"/>
+              </a:lnSpc>
+              <a:spcBef>
+                <a:spcPct val="0"/>
+              </a:spcBef>
+            </a:pPr>
+            <a:r>
+              <a:rPr lang="en-US" sz="4000" spc="-126" dirty="0">
+                <a:solidFill>
+                  <a:srgbClr val="F4F4F4"/>
+                </a:solidFill>
+                <a:latin typeface="Poppins"/>
+                <a:ea typeface="Poppins"/>
+                <a:cs typeface="Poppins"/>
+                <a:sym typeface="Poppins"/>
+              </a:rPr>
+              <a:t>Dataset Overview</a:t>
+            </a:r>
+          </a:p>
+        </p:txBody>
+      </p:sp>
+      <p:sp>
+        <p:nvSpPr>
+          <p:cNvPr id="13" name="TextBox 12">
+            <a:extLst>
+              <a:ext uri="{FF2B5EF4-FFF2-40B4-BE49-F238E27FC236}">
+                <a16:creationId xmlns:a16="http://schemas.microsoft.com/office/drawing/2014/main" id="{3B3B37D6-A6D8-668F-41CB-F921EF5B1FC2}"/>
+              </a:ext>
+            </a:extLst>
+          </p:cNvPr>
+          <p:cNvSpPr txBox="1"/>
+          <p:nvPr/>
+        </p:nvSpPr>
+        <p:spPr>
+          <a:xfrm>
+            <a:off x="2476500" y="3771900"/>
+            <a:ext cx="13335000" cy="2400657"/>
+          </a:xfrm>
+          <a:prstGeom prst="rect">
+            <a:avLst/>
+          </a:prstGeom>
+          <a:noFill/>
+        </p:spPr>
+        <p:txBody>
+          <a:bodyPr wrap="square" rtlCol="0">
+            <a:spAutoFit/>
+          </a:bodyPr>
+          <a:lstStyle/>
+          <a:p>
+            <a:pPr algn="just"/>
+            <a:r>
+              <a:rPr lang="en-US" sz="3000" dirty="0">
+                <a:solidFill>
+                  <a:srgbClr val="F4F4F4"/>
+                </a:solidFill>
+                <a:latin typeface="Inter Extra-Light"/>
+                <a:ea typeface="Inter Extra-Light"/>
+                <a:cs typeface="Inter Extra-Light"/>
+                <a:sym typeface="Inter Extra-Light"/>
+              </a:rPr>
+              <a:t>Dataset: 891 passenger reviews across 15 columns. </a:t>
+            </a:r>
+          </a:p>
+          <a:p>
+            <a:pPr algn="just"/>
+            <a:endParaRPr lang="en-US" sz="3000" dirty="0">
+              <a:solidFill>
+                <a:srgbClr val="F4F4F4"/>
+              </a:solidFill>
+              <a:latin typeface="Inter Extra-Light"/>
+              <a:ea typeface="Inter Extra-Light"/>
+              <a:cs typeface="Inter Extra-Light"/>
+              <a:sym typeface="Inter Extra-Light"/>
+            </a:endParaRPr>
+          </a:p>
+          <a:p>
+            <a:pPr algn="just"/>
+            <a:r>
+              <a:rPr lang="en-US" sz="3000" dirty="0">
+                <a:solidFill>
+                  <a:srgbClr val="F4F4F4"/>
+                </a:solidFill>
+                <a:latin typeface="Inter Extra-Light"/>
+                <a:ea typeface="Inter Extra-Light"/>
+                <a:cs typeface="Inter Extra-Light"/>
+                <a:sym typeface="Inter Extra-Light"/>
+              </a:rPr>
+              <a:t>Scope covers Seat Comfort, Cabin Staff Service, Food &amp; Beverages, Inflight Entertainment, Ground Service, Value for Money, Wi-Fi/Connectivity, and Recommendation. </a:t>
+            </a:r>
+          </a:p>
+        </p:txBody>
+      </p:sp>
+    </p:spTree>
+    <p:extLst>
+      <p:ext uri="{BB962C8B-B14F-4D97-AF65-F5344CB8AC3E}">
+        <p14:creationId xmlns:p14="http://schemas.microsoft.com/office/powerpoint/2010/main" val="3508495725"/>
+      </p:ext>
+    </p:extLst>
+  </p:cSld>
+  <p:clrMapOvr>
+    <a:masterClrMapping/>
+  </p:clrMapOvr>
+</p:sld>
+</file>
+
+<file path=ppt/slides/slide20.xml><?xml version="1.0" encoding="utf-8"?>
 <p:sld xmlns:a="http://schemas.openxmlformats.org/drawingml/2006/main" xmlns:r="http://schemas.openxmlformats.org/officeDocument/2006/relationships" xmlns:p="http://schemas.openxmlformats.org/presentationml/2006/main">
   <p:cSld>
     <p:bg>
@@ -12348,6 +13976,13 @@
             <a:tailEnd type="none" w="sm" len="sm"/>
           </a:ln>
         </p:spPr>
+        <p:txBody>
+          <a:bodyPr/>
+          <a:lstStyle/>
+          <a:p>
+            <a:endParaRPr lang="en-PH"/>
+          </a:p>
+        </p:txBody>
       </p:sp>
       <p:grpSp>
         <p:nvGrpSpPr>
@@ -12456,6 +14091,13 @@
               <a:round/>
             </a:ln>
           </p:spPr>
+          <p:txBody>
+            <a:bodyPr/>
+            <a:lstStyle/>
+            <a:p>
+              <a:endParaRPr lang="en-PH"/>
+            </a:p>
+          </p:txBody>
         </p:sp>
         <p:sp>
           <p:nvSpPr>
@@ -12610,6 +14252,13 @@
               <a:round/>
             </a:ln>
           </p:spPr>
+          <p:txBody>
+            <a:bodyPr/>
+            <a:lstStyle/>
+            <a:p>
+              <a:endParaRPr lang="en-PH"/>
+            </a:p>
+          </p:txBody>
         </p:sp>
         <p:sp>
           <p:nvSpPr>
@@ -12769,6 +14418,13 @@
               <a:round/>
             </a:ln>
           </p:spPr>
+          <p:txBody>
+            <a:bodyPr/>
+            <a:lstStyle/>
+            <a:p>
+              <a:endParaRPr lang="en-PH"/>
+            </a:p>
+          </p:txBody>
         </p:sp>
         <p:sp>
           <p:nvSpPr>
@@ -12923,6 +14579,13 @@
               <a:round/>
             </a:ln>
           </p:spPr>
+          <p:txBody>
+            <a:bodyPr/>
+            <a:lstStyle/>
+            <a:p>
+              <a:endParaRPr lang="en-PH"/>
+            </a:p>
+          </p:txBody>
         </p:sp>
         <p:sp>
           <p:nvSpPr>
@@ -13077,6 +14740,13 @@
               <a:round/>
             </a:ln>
           </p:spPr>
+          <p:txBody>
+            <a:bodyPr/>
+            <a:lstStyle/>
+            <a:p>
+              <a:endParaRPr lang="en-PH"/>
+            </a:p>
+          </p:txBody>
         </p:sp>
         <p:sp>
           <p:nvSpPr>
@@ -13227,6 +14897,13 @@
               <a:miter/>
             </a:ln>
           </p:spPr>
+          <p:txBody>
+            <a:bodyPr/>
+            <a:lstStyle/>
+            <a:p>
+              <a:endParaRPr lang="en-PH"/>
+            </a:p>
+          </p:txBody>
         </p:sp>
         <p:sp>
           <p:nvSpPr>
@@ -13377,6 +15054,13 @@
               <a:miter/>
             </a:ln>
           </p:spPr>
+          <p:txBody>
+            <a:bodyPr/>
+            <a:lstStyle/>
+            <a:p>
+              <a:endParaRPr lang="en-PH"/>
+            </a:p>
+          </p:txBody>
         </p:sp>
         <p:sp>
           <p:nvSpPr>
@@ -13527,6 +15211,13 @@
               <a:miter/>
             </a:ln>
           </p:spPr>
+          <p:txBody>
+            <a:bodyPr/>
+            <a:lstStyle/>
+            <a:p>
+              <a:endParaRPr lang="en-PH"/>
+            </a:p>
+          </p:txBody>
         </p:sp>
         <p:sp>
           <p:nvSpPr>
@@ -13677,6 +15368,13 @@
               <a:miter/>
             </a:ln>
           </p:spPr>
+          <p:txBody>
+            <a:bodyPr/>
+            <a:lstStyle/>
+            <a:p>
+              <a:endParaRPr lang="en-PH"/>
+            </a:p>
+          </p:txBody>
         </p:sp>
         <p:sp>
           <p:nvSpPr>
@@ -13827,6 +15525,13 @@
               <a:miter/>
             </a:ln>
           </p:spPr>
+          <p:txBody>
+            <a:bodyPr/>
+            <a:lstStyle/>
+            <a:p>
+              <a:endParaRPr lang="en-PH"/>
+            </a:p>
+          </p:txBody>
         </p:sp>
         <p:sp>
           <p:nvSpPr>
@@ -13917,7 +15622,7 @@
 </p:sld>
 </file>
 
-<file path=ppt/slides/slide2.xml><?xml version="1.0" encoding="utf-8"?>
+<file path=ppt/slides/slide3.xml><?xml version="1.0" encoding="utf-8"?>
 <p:sld xmlns:a="http://schemas.openxmlformats.org/drawingml/2006/main" xmlns:r="http://schemas.openxmlformats.org/officeDocument/2006/relationships" xmlns:p="http://schemas.openxmlformats.org/presentationml/2006/main">
   <p:cSld>
     <p:bg>
@@ -13953,7 +15658,7 @@
         <p:cNvPr id="1" name="">
           <a:extLst>
             <a:ext uri="{FF2B5EF4-FFF2-40B4-BE49-F238E27FC236}">
-              <a16:creationId xmlns:a16="http://schemas.microsoft.com/office/drawing/2014/main" id="{09BC29A0-CB03-217E-DFDB-B2E3193C3827}"/>
+              <a16:creationId xmlns:a16="http://schemas.microsoft.com/office/drawing/2014/main" id="{D8D8B234-1897-02D7-6324-3131DDA8E65D}"/>
             </a:ext>
           </a:extLst>
         </p:cNvPr>
@@ -13970,10 +15675,10 @@
       </p:grpSpPr>
       <p:sp>
         <p:nvSpPr>
-          <p:cNvPr id="9" name="TextBox 8">
+          <p:cNvPr id="13" name="TextBox 12">
             <a:extLst>
               <a:ext uri="{FF2B5EF4-FFF2-40B4-BE49-F238E27FC236}">
-                <a16:creationId xmlns:a16="http://schemas.microsoft.com/office/drawing/2014/main" id="{110B670E-29EB-86C9-AB19-80B682E8F6A1}"/>
+                <a16:creationId xmlns:a16="http://schemas.microsoft.com/office/drawing/2014/main" id="{F29D1704-B24C-E312-6F2B-3CCBC7036A81}"/>
               </a:ext>
             </a:extLst>
           </p:cNvPr>
@@ -13982,58 +15687,8 @@
         </p:nvSpPr>
         <p:spPr>
           <a:xfrm>
-            <a:off x="1371600" y="1790700"/>
-            <a:ext cx="6967016" cy="551959"/>
-          </a:xfrm>
-          <a:prstGeom prst="rect">
-            <a:avLst/>
-          </a:prstGeom>
-        </p:spPr>
-        <p:txBody>
-          <a:bodyPr lIns="0" tIns="0" rIns="0" bIns="0" rtlCol="0" anchor="t">
-            <a:spAutoFit/>
-          </a:bodyPr>
-          <a:lstStyle/>
-          <a:p>
-            <a:pPr marL="0" lvl="0" indent="0" algn="l">
-              <a:lnSpc>
-                <a:spcPts val="4227"/>
-              </a:lnSpc>
-              <a:spcBef>
-                <a:spcPct val="0"/>
-              </a:spcBef>
-            </a:pPr>
-            <a:r>
-              <a:rPr lang="en-US" sz="4000" spc="-126" dirty="0">
-                <a:solidFill>
-                  <a:srgbClr val="F4F4F4"/>
-                </a:solidFill>
-                <a:latin typeface="Poppins"/>
-                <a:ea typeface="Poppins"/>
-                <a:cs typeface="Poppins"/>
-                <a:sym typeface="Poppins"/>
-              </a:rPr>
-              <a:t>Dataset Overview</a:t>
-            </a:r>
-          </a:p>
-        </p:txBody>
-      </p:sp>
-      <p:sp>
-        <p:nvSpPr>
-          <p:cNvPr id="13" name="TextBox 12">
-            <a:extLst>
-              <a:ext uri="{FF2B5EF4-FFF2-40B4-BE49-F238E27FC236}">
-                <a16:creationId xmlns:a16="http://schemas.microsoft.com/office/drawing/2014/main" id="{3B3B37D6-A6D8-668F-41CB-F921EF5B1FC2}"/>
-              </a:ext>
-            </a:extLst>
-          </p:cNvPr>
-          <p:cNvSpPr txBox="1"/>
-          <p:nvPr/>
-        </p:nvSpPr>
-        <p:spPr>
-          <a:xfrm>
-            <a:off x="2476500" y="3771900"/>
-            <a:ext cx="13335000" cy="1938992"/>
+            <a:off x="2209800" y="1714500"/>
+            <a:ext cx="13525500" cy="6524863"/>
           </a:xfrm>
           <a:prstGeom prst="rect">
             <a:avLst/>
@@ -14046,18 +15701,227 @@
           </a:bodyPr>
           <a:lstStyle/>
           <a:p>
-            <a:pPr algn="ctr"/>
+            <a:pPr fontAlgn="base"/>
             <a:r>
-              <a:rPr lang="en-US" sz="3000" dirty="0">
+              <a:rPr lang="en-PH" sz="5000" b="1" dirty="0">
                 <a:solidFill>
-                  <a:srgbClr val="F4F4F4"/>
+                  <a:schemeClr val="bg1"/>
                 </a:solidFill>
-                <a:latin typeface="Inter Extra-Light"/>
-                <a:ea typeface="Inter Extra-Light"/>
-                <a:cs typeface="Inter Extra-Light"/>
-                <a:sym typeface="Inter Extra-Light"/>
+                <a:latin typeface="Inter Extra-Light" panose="020B0604020202020204" charset="0"/>
+                <a:ea typeface="Inter Extra-Light" panose="020B0604020202020204" charset="0"/>
               </a:rPr>
-              <a:t>Dataset: 891 passenger reviews across 15 columns. Scope covers Seat Comfort, Cabin Staff Service, Food &amp; Beverages, Inflight Entertainment, Ground Service, Value for Money, Wi-Fi/Connectivity, and Recommendation. </a:t>
+              <a:t>What This Analysis Delivers</a:t>
+            </a:r>
+          </a:p>
+          <a:p>
+            <a:pPr fontAlgn="base"/>
+            <a:endParaRPr lang="en-PH" b="1" dirty="0">
+              <a:solidFill>
+                <a:schemeClr val="bg1"/>
+              </a:solidFill>
+            </a:endParaRPr>
+          </a:p>
+          <a:p>
+            <a:pPr lvl="0" fontAlgn="base"/>
+            <a:r>
+              <a:rPr lang="en-PH" sz="2500" b="1" dirty="0">
+                <a:solidFill>
+                  <a:schemeClr val="bg1"/>
+                </a:solidFill>
+                <a:latin typeface="Inter Extra-Light" panose="020B0604020202020204" charset="0"/>
+                <a:ea typeface="Inter Extra-Light" panose="020B0604020202020204" charset="0"/>
+              </a:rPr>
+              <a:t>For Decision-Makers</a:t>
+            </a:r>
+          </a:p>
+          <a:p>
+            <a:pPr marL="342900" lvl="0" indent="-342900" fontAlgn="base">
+              <a:buFont typeface="Arial" panose="020B0604020202020204" pitchFamily="34" charset="0"/>
+              <a:buChar char="•"/>
+            </a:pPr>
+            <a:r>
+              <a:rPr lang="en-PH" sz="2500" dirty="0">
+                <a:solidFill>
+                  <a:schemeClr val="bg1"/>
+                </a:solidFill>
+                <a:latin typeface="Inter Extra-Light" panose="020B0604020202020204" charset="0"/>
+                <a:ea typeface="Inter Extra-Light" panose="020B0604020202020204" charset="0"/>
+              </a:rPr>
+              <a:t>Clear priorities for resource allocation</a:t>
+            </a:r>
+          </a:p>
+          <a:p>
+            <a:pPr marL="342900" lvl="0" indent="-342900" fontAlgn="base">
+              <a:buFont typeface="Arial" panose="020B0604020202020204" pitchFamily="34" charset="0"/>
+              <a:buChar char="•"/>
+            </a:pPr>
+            <a:r>
+              <a:rPr lang="en-PH" sz="2500" dirty="0">
+                <a:solidFill>
+                  <a:schemeClr val="bg1"/>
+                </a:solidFill>
+                <a:latin typeface="Inter Extra-Light" panose="020B0604020202020204" charset="0"/>
+                <a:ea typeface="Inter Extra-Light" panose="020B0604020202020204" charset="0"/>
+              </a:rPr>
+              <a:t>Evidence to support strategic investments</a:t>
+            </a:r>
+          </a:p>
+          <a:p>
+            <a:pPr marL="342900" lvl="0" indent="-342900" fontAlgn="base">
+              <a:buFont typeface="Arial" panose="020B0604020202020204" pitchFamily="34" charset="0"/>
+              <a:buChar char="•"/>
+            </a:pPr>
+            <a:r>
+              <a:rPr lang="en-PH" sz="2500" dirty="0">
+                <a:solidFill>
+                  <a:schemeClr val="bg1"/>
+                </a:solidFill>
+                <a:latin typeface="Inter Extra-Light" panose="020B0604020202020204" charset="0"/>
+                <a:ea typeface="Inter Extra-Light" panose="020B0604020202020204" charset="0"/>
+              </a:rPr>
+              <a:t>Understanding of what impacts recommendations most</a:t>
+            </a:r>
+          </a:p>
+          <a:p>
+            <a:pPr lvl="0" fontAlgn="base"/>
+            <a:endParaRPr lang="en-PH" sz="2500" dirty="0">
+              <a:solidFill>
+                <a:schemeClr val="bg1"/>
+              </a:solidFill>
+              <a:latin typeface="Inter Extra-Light" panose="020B0604020202020204" charset="0"/>
+              <a:ea typeface="Inter Extra-Light" panose="020B0604020202020204" charset="0"/>
+            </a:endParaRPr>
+          </a:p>
+          <a:p>
+            <a:pPr lvl="0" fontAlgn="base"/>
+            <a:r>
+              <a:rPr lang="en-PH" sz="2500" b="1" dirty="0">
+                <a:solidFill>
+                  <a:schemeClr val="bg1"/>
+                </a:solidFill>
+                <a:latin typeface="Inter Extra-Light" panose="020B0604020202020204" charset="0"/>
+                <a:ea typeface="Inter Extra-Light" panose="020B0604020202020204" charset="0"/>
+              </a:rPr>
+              <a:t>For Different Departments</a:t>
+            </a:r>
+          </a:p>
+          <a:p>
+            <a:pPr marL="342900" lvl="0" indent="-342900" fontAlgn="base">
+              <a:buFont typeface="Arial" panose="020B0604020202020204" pitchFamily="34" charset="0"/>
+              <a:buChar char="•"/>
+            </a:pPr>
+            <a:r>
+              <a:rPr lang="en-PH" sz="2500" dirty="0">
+                <a:solidFill>
+                  <a:schemeClr val="bg1"/>
+                </a:solidFill>
+                <a:latin typeface="Inter Extra-Light" panose="020B0604020202020204" charset="0"/>
+                <a:ea typeface="Inter Extra-Light" panose="020B0604020202020204" charset="0"/>
+              </a:rPr>
+              <a:t>Marketing: Highlight PAL's strongest attributes</a:t>
+            </a:r>
+          </a:p>
+          <a:p>
+            <a:pPr marL="342900" lvl="0" indent="-342900" fontAlgn="base">
+              <a:buFont typeface="Arial" panose="020B0604020202020204" pitchFamily="34" charset="0"/>
+              <a:buChar char="•"/>
+            </a:pPr>
+            <a:r>
+              <a:rPr lang="en-PH" sz="2500" dirty="0">
+                <a:solidFill>
+                  <a:schemeClr val="bg1"/>
+                </a:solidFill>
+                <a:latin typeface="Inter Extra-Light" panose="020B0604020202020204" charset="0"/>
+                <a:ea typeface="Inter Extra-Light" panose="020B0604020202020204" charset="0"/>
+              </a:rPr>
+              <a:t>Operations: Address critical service weaknesses</a:t>
+            </a:r>
+          </a:p>
+          <a:p>
+            <a:pPr marL="342900" lvl="0" indent="-342900" fontAlgn="base">
+              <a:buFont typeface="Arial" panose="020B0604020202020204" pitchFamily="34" charset="0"/>
+              <a:buChar char="•"/>
+            </a:pPr>
+            <a:r>
+              <a:rPr lang="en-PH" sz="2500" dirty="0">
+                <a:solidFill>
+                  <a:schemeClr val="bg1"/>
+                </a:solidFill>
+                <a:latin typeface="Inter Extra-Light" panose="020B0604020202020204" charset="0"/>
+                <a:ea typeface="Inter Extra-Light" panose="020B0604020202020204" charset="0"/>
+              </a:rPr>
+              <a:t>Customer Service: Focus on experience drivers</a:t>
+            </a:r>
+          </a:p>
+          <a:p>
+            <a:pPr lvl="0" fontAlgn="base"/>
+            <a:endParaRPr lang="en-PH" sz="2500" dirty="0">
+              <a:solidFill>
+                <a:schemeClr val="bg1"/>
+              </a:solidFill>
+              <a:latin typeface="Inter Extra-Light" panose="020B0604020202020204" charset="0"/>
+              <a:ea typeface="Inter Extra-Light" panose="020B0604020202020204" charset="0"/>
+            </a:endParaRPr>
+          </a:p>
+          <a:p>
+            <a:pPr lvl="0" fontAlgn="base"/>
+            <a:r>
+              <a:rPr lang="en-PH" sz="2500" b="1" dirty="0">
+                <a:solidFill>
+                  <a:schemeClr val="bg1"/>
+                </a:solidFill>
+                <a:latin typeface="Inter Extra-Light" panose="020B0604020202020204" charset="0"/>
+                <a:ea typeface="Inter Extra-Light" panose="020B0604020202020204" charset="0"/>
+              </a:rPr>
+              <a:t>Bottom Line Impact</a:t>
+            </a:r>
+          </a:p>
+          <a:p>
+            <a:pPr marL="342900" lvl="0" indent="-342900" fontAlgn="base">
+              <a:buFont typeface="Arial" panose="020B0604020202020204" pitchFamily="34" charset="0"/>
+              <a:buChar char="•"/>
+            </a:pPr>
+            <a:r>
+              <a:rPr lang="en-PH" sz="2500" dirty="0">
+                <a:solidFill>
+                  <a:schemeClr val="bg1"/>
+                </a:solidFill>
+                <a:latin typeface="Inter Extra-Light" panose="020B0604020202020204" charset="0"/>
+                <a:ea typeface="Inter Extra-Light" panose="020B0604020202020204" charset="0"/>
+              </a:rPr>
+              <a:t>Targeted improvements that increase recommendations</a:t>
+            </a:r>
+          </a:p>
+          <a:p>
+            <a:pPr marL="342900" lvl="0" indent="-342900" fontAlgn="base">
+              <a:buFont typeface="Arial" panose="020B0604020202020204" pitchFamily="34" charset="0"/>
+              <a:buChar char="•"/>
+            </a:pPr>
+            <a:r>
+              <a:rPr lang="en-PH" sz="2500" dirty="0">
+                <a:solidFill>
+                  <a:schemeClr val="bg1"/>
+                </a:solidFill>
+                <a:latin typeface="Inter Extra-Light" panose="020B0604020202020204" charset="0"/>
+                <a:ea typeface="Inter Extra-Light" panose="020B0604020202020204" charset="0"/>
+              </a:rPr>
+              <a:t>Better passenger experience across all touchpoints</a:t>
+            </a:r>
+          </a:p>
+          <a:p>
+            <a:pPr marL="342900" lvl="0" indent="-342900" fontAlgn="base">
+              <a:buFont typeface="Arial" panose="020B0604020202020204" pitchFamily="34" charset="0"/>
+              <a:buChar char="•"/>
+            </a:pPr>
+            <a:r>
+              <a:rPr lang="en-PH" sz="2500" dirty="0">
+                <a:solidFill>
+                  <a:schemeClr val="bg1"/>
+                </a:solidFill>
+                <a:latin typeface="Inter Extra-Light" panose="020B0604020202020204" charset="0"/>
+                <a:ea typeface="Inter Extra-Light" panose="020B0604020202020204" charset="0"/>
+              </a:rPr>
+              <a:t>Stronger competitive position in the market</a:t>
             </a:r>
           </a:p>
         </p:txBody>
@@ -14065,7 +15929,7 @@
     </p:spTree>
     <p:extLst>
       <p:ext uri="{BB962C8B-B14F-4D97-AF65-F5344CB8AC3E}">
-        <p14:creationId xmlns:p14="http://schemas.microsoft.com/office/powerpoint/2010/main" val="3508495725"/>
+        <p14:creationId xmlns:p14="http://schemas.microsoft.com/office/powerpoint/2010/main" val="696434295"/>
       </p:ext>
     </p:extLst>
   </p:cSld>
@@ -14075,7 +15939,7 @@
 </p:sld>
 </file>
 
-<file path=ppt/slides/slide3.xml><?xml version="1.0" encoding="utf-8"?>
+<file path=ppt/slides/slide4.xml><?xml version="1.0" encoding="utf-8"?>
 <p:sld xmlns:a="http://schemas.openxmlformats.org/drawingml/2006/main" xmlns:r="http://schemas.openxmlformats.org/officeDocument/2006/relationships" xmlns:p="http://schemas.openxmlformats.org/presentationml/2006/main">
   <p:cSld>
     <p:bg>
@@ -14143,6 +16007,13 @@
             <a:tailEnd type="none" w="sm" len="sm"/>
           </a:ln>
         </p:spPr>
+        <p:txBody>
+          <a:bodyPr/>
+          <a:lstStyle/>
+          <a:p>
+            <a:endParaRPr lang="en-PH"/>
+          </a:p>
+        </p:txBody>
       </p:sp>
       <p:grpSp>
         <p:nvGrpSpPr>
@@ -14259,6 +16130,13 @@
               <a:round/>
             </a:ln>
           </p:spPr>
+          <p:txBody>
+            <a:bodyPr/>
+            <a:lstStyle/>
+            <a:p>
+              <a:endParaRPr lang="en-PH"/>
+            </a:p>
+          </p:txBody>
         </p:sp>
         <p:sp>
           <p:nvSpPr>
@@ -14358,8 +16236,8 @@
         </p:nvSpPr>
         <p:spPr>
           <a:xfrm>
-            <a:off x="2038350" y="2546377"/>
-            <a:ext cx="14211300" cy="2400657"/>
+            <a:off x="1524000" y="2400301"/>
+            <a:ext cx="14725650" cy="2400657"/>
           </a:xfrm>
           <a:prstGeom prst="rect">
             <a:avLst/>
@@ -14383,422 +16261,9 @@
                 <a:cs typeface="Inter Extra-Light"/>
                 <a:sym typeface="Inter Extra-Light"/>
               </a:rPr>
-              <a:t>Goal: Identify strengths, weaknesses, and key drivers of passenger satisfaction for PAL Airline s 2019 - 2022</a:t>
+              <a:t>Goal: Identify strengths, weaknesses, and key drivers of passenger satisfaction for PAL Airlines 2019 - 2022</a:t>
             </a:r>
             <a:endParaRPr lang="en-PH" sz="5000" dirty="0"/>
-          </a:p>
-        </p:txBody>
-      </p:sp>
-    </p:spTree>
-  </p:cSld>
-  <p:clrMapOvr>
-    <a:masterClrMapping/>
-  </p:clrMapOvr>
-</p:sld>
-</file>
-
-<file path=ppt/slides/slide4.xml><?xml version="1.0" encoding="utf-8"?>
-<p:sld xmlns:a="http://schemas.openxmlformats.org/drawingml/2006/main" xmlns:r="http://schemas.openxmlformats.org/officeDocument/2006/relationships" xmlns:p="http://schemas.openxmlformats.org/presentationml/2006/main">
-  <p:cSld>
-    <p:bg>
-      <p:bgPr>
-        <a:gradFill rotWithShape="1">
-          <a:gsLst>
-            <a:gs pos="0">
-              <a:srgbClr val="6B1124">
-                <a:alpha val="100000"/>
-              </a:srgbClr>
-            </a:gs>
-            <a:gs pos="50000">
-              <a:srgbClr val="000000">
-                <a:alpha val="100000"/>
-              </a:srgbClr>
-            </a:gs>
-            <a:gs pos="100000">
-              <a:srgbClr val="6B1124">
-                <a:alpha val="100000"/>
-              </a:srgbClr>
-            </a:gs>
-          </a:gsLst>
-          <a:path path="circle">
-            <a:fillToRect r="100000" b="100000"/>
-          </a:path>
-          <a:tileRect l="-100000" t="-100000"/>
-        </a:gradFill>
-        <a:effectLst/>
-      </p:bgPr>
-    </p:bg>
-    <p:spTree>
-      <p:nvGrpSpPr>
-        <p:cNvPr id="1" name=""/>
-        <p:cNvGrpSpPr/>
-        <p:nvPr/>
-      </p:nvGrpSpPr>
-      <p:grpSpPr>
-        <a:xfrm>
-          <a:off x="0" y="0"/>
-          <a:ext cx="0" cy="0"/>
-          <a:chOff x="0" y="0"/>
-          <a:chExt cx="0" cy="0"/>
-        </a:xfrm>
-      </p:grpSpPr>
-      <p:sp>
-        <p:nvSpPr>
-          <p:cNvPr id="2" name="AutoShape 2"/>
-          <p:cNvSpPr/>
-          <p:nvPr/>
-        </p:nvSpPr>
-        <p:spPr>
-          <a:xfrm flipV="1">
-            <a:off x="0" y="5143500"/>
-            <a:ext cx="18288000" cy="0"/>
-          </a:xfrm>
-          <a:prstGeom prst="line">
-            <a:avLst/>
-          </a:prstGeom>
-          <a:ln w="9525" cap="rnd">
-            <a:solidFill>
-              <a:srgbClr val="F4F4F4"/>
-            </a:solidFill>
-            <a:prstDash val="solid"/>
-            <a:headEnd type="none" w="sm" len="sm"/>
-            <a:tailEnd type="none" w="sm" len="sm"/>
-          </a:ln>
-        </p:spPr>
-      </p:sp>
-      <p:sp>
-        <p:nvSpPr>
-          <p:cNvPr id="4" name="TextBox 4"/>
-          <p:cNvSpPr txBox="1"/>
-          <p:nvPr/>
-        </p:nvSpPr>
-        <p:spPr>
-          <a:xfrm>
-            <a:off x="9494920" y="7124700"/>
-            <a:ext cx="6967016" cy="509411"/>
-          </a:xfrm>
-          <a:prstGeom prst="rect">
-            <a:avLst/>
-          </a:prstGeom>
-        </p:spPr>
-        <p:txBody>
-          <a:bodyPr lIns="0" tIns="0" rIns="0" bIns="0" rtlCol="0" anchor="t">
-            <a:spAutoFit/>
-          </a:bodyPr>
-          <a:lstStyle/>
-          <a:p>
-            <a:pPr marL="0" lvl="0" indent="0" algn="l">
-              <a:lnSpc>
-                <a:spcPts val="3947"/>
-              </a:lnSpc>
-              <a:spcBef>
-                <a:spcPct val="0"/>
-              </a:spcBef>
-            </a:pPr>
-            <a:r>
-              <a:rPr lang="en-US" sz="2819" spc="-118">
-                <a:solidFill>
-                  <a:srgbClr val="F4F4F4"/>
-                </a:solidFill>
-                <a:latin typeface="Poppins"/>
-                <a:ea typeface="Poppins"/>
-                <a:cs typeface="Poppins"/>
-                <a:sym typeface="Poppins"/>
-              </a:rPr>
-              <a:t>Yes vs. No Recommendation Patterns</a:t>
-            </a:r>
-          </a:p>
-        </p:txBody>
-      </p:sp>
-      <p:sp>
-        <p:nvSpPr>
-          <p:cNvPr id="5" name="TextBox 5"/>
-          <p:cNvSpPr txBox="1"/>
-          <p:nvPr/>
-        </p:nvSpPr>
-        <p:spPr>
-          <a:xfrm>
-            <a:off x="9494920" y="8133916"/>
-            <a:ext cx="7556647" cy="542777"/>
-          </a:xfrm>
-          <a:prstGeom prst="rect">
-            <a:avLst/>
-          </a:prstGeom>
-        </p:spPr>
-        <p:txBody>
-          <a:bodyPr lIns="0" tIns="0" rIns="0" bIns="0" rtlCol="0" anchor="t">
-            <a:spAutoFit/>
-          </a:bodyPr>
-          <a:lstStyle/>
-          <a:p>
-            <a:pPr marL="0" lvl="0" indent="0" algn="just">
-              <a:lnSpc>
-                <a:spcPts val="2238"/>
-              </a:lnSpc>
-              <a:spcBef>
-                <a:spcPct val="0"/>
-              </a:spcBef>
-            </a:pPr>
-            <a:r>
-              <a:rPr lang="en-US" sz="1598" dirty="0">
-                <a:solidFill>
-                  <a:srgbClr val="F4F4F4"/>
-                </a:solidFill>
-                <a:latin typeface="Inter Extra-Light"/>
-                <a:ea typeface="Inter Extra-Light"/>
-                <a:cs typeface="Inter Extra-Light"/>
-                <a:sym typeface="Inter Extra-Light"/>
-              </a:rPr>
-              <a:t>Passengers were asked whether they would recommend Philippine Airlines. The majority responded No, indicating overall dissatisfaction. </a:t>
-            </a:r>
-          </a:p>
-        </p:txBody>
-      </p:sp>
-      <p:grpSp>
-        <p:nvGrpSpPr>
-          <p:cNvPr id="6" name="Group 6"/>
-          <p:cNvGrpSpPr/>
-          <p:nvPr/>
-        </p:nvGrpSpPr>
-        <p:grpSpPr>
-          <a:xfrm>
-            <a:off x="-4262394" y="795421"/>
-            <a:ext cx="9573334" cy="8229600"/>
-            <a:chOff x="0" y="0"/>
-            <a:chExt cx="1483160" cy="1274980"/>
-          </a:xfrm>
-        </p:grpSpPr>
-        <p:sp>
-          <p:nvSpPr>
-            <p:cNvPr id="7" name="Freeform 7"/>
-            <p:cNvSpPr/>
-            <p:nvPr/>
-          </p:nvSpPr>
-          <p:spPr>
-            <a:xfrm>
-              <a:off x="0" y="0"/>
-              <a:ext cx="1483160" cy="1274980"/>
-            </a:xfrm>
-            <a:custGeom>
-              <a:avLst/>
-              <a:gdLst/>
-              <a:ahLst/>
-              <a:cxnLst/>
-              <a:rect l="l" t="t" r="r" b="b"/>
-              <a:pathLst>
-                <a:path w="1483160" h="1274980">
-                  <a:moveTo>
-                    <a:pt x="49330" y="0"/>
-                  </a:moveTo>
-                  <a:lnTo>
-                    <a:pt x="1433829" y="0"/>
-                  </a:lnTo>
-                  <a:cubicBezTo>
-                    <a:pt x="1446913" y="0"/>
-                    <a:pt x="1459460" y="5197"/>
-                    <a:pt x="1468711" y="14449"/>
-                  </a:cubicBezTo>
-                  <a:cubicBezTo>
-                    <a:pt x="1477963" y="23700"/>
-                    <a:pt x="1483160" y="36247"/>
-                    <a:pt x="1483160" y="49330"/>
-                  </a:cubicBezTo>
-                  <a:lnTo>
-                    <a:pt x="1483160" y="1225650"/>
-                  </a:lnTo>
-                  <a:cubicBezTo>
-                    <a:pt x="1483160" y="1238733"/>
-                    <a:pt x="1477963" y="1251281"/>
-                    <a:pt x="1468711" y="1260532"/>
-                  </a:cubicBezTo>
-                  <a:cubicBezTo>
-                    <a:pt x="1459460" y="1269783"/>
-                    <a:pt x="1446913" y="1274980"/>
-                    <a:pt x="1433829" y="1274980"/>
-                  </a:cubicBezTo>
-                  <a:lnTo>
-                    <a:pt x="49330" y="1274980"/>
-                  </a:lnTo>
-                  <a:cubicBezTo>
-                    <a:pt x="36247" y="1274980"/>
-                    <a:pt x="23700" y="1269783"/>
-                    <a:pt x="14449" y="1260532"/>
-                  </a:cubicBezTo>
-                  <a:cubicBezTo>
-                    <a:pt x="5197" y="1251281"/>
-                    <a:pt x="0" y="1238733"/>
-                    <a:pt x="0" y="1225650"/>
-                  </a:cubicBezTo>
-                  <a:lnTo>
-                    <a:pt x="0" y="49330"/>
-                  </a:lnTo>
-                  <a:cubicBezTo>
-                    <a:pt x="0" y="36247"/>
-                    <a:pt x="5197" y="23700"/>
-                    <a:pt x="14449" y="14449"/>
-                  </a:cubicBezTo>
-                  <a:cubicBezTo>
-                    <a:pt x="23700" y="5197"/>
-                    <a:pt x="36247" y="0"/>
-                    <a:pt x="49330" y="0"/>
-                  </a:cubicBezTo>
-                  <a:close/>
-                </a:path>
-              </a:pathLst>
-            </a:custGeom>
-            <a:blipFill>
-              <a:blip r:embed="rId2"/>
-              <a:stretch>
-                <a:fillRect l="-197" r="-197"/>
-              </a:stretch>
-            </a:blipFill>
-            <a:ln w="9525" cap="rnd">
-              <a:solidFill>
-                <a:srgbClr val="FFFFFF"/>
-              </a:solidFill>
-              <a:prstDash val="solid"/>
-              <a:round/>
-            </a:ln>
-          </p:spPr>
-        </p:sp>
-      </p:grpSp>
-      <p:pic>
-        <p:nvPicPr>
-          <p:cNvPr id="9" name="Picture 8">
-            <a:extLst>
-              <a:ext uri="{FF2B5EF4-FFF2-40B4-BE49-F238E27FC236}">
-                <a16:creationId xmlns:a16="http://schemas.microsoft.com/office/drawing/2014/main" id="{B294938F-E370-393A-13CC-EAA0D9EA0A51}"/>
-              </a:ext>
-            </a:extLst>
-          </p:cNvPr>
-          <p:cNvPicPr>
-            <a:picLocks noChangeAspect="1"/>
-          </p:cNvPicPr>
-          <p:nvPr/>
-        </p:nvPicPr>
-        <p:blipFill>
-          <a:blip r:embed="rId3">
-            <a:extLst>
-              <a:ext uri="{28A0092B-C50C-407E-A947-70E740481C1C}">
-                <a14:useLocalDpi xmlns:a14="http://schemas.microsoft.com/office/drawing/2010/main" val="0"/>
-              </a:ext>
-            </a:extLst>
-          </a:blip>
-          <a:stretch>
-            <a:fillRect/>
-          </a:stretch>
-        </p:blipFill>
-        <p:spPr>
-          <a:xfrm>
-            <a:off x="7044156" y="1403291"/>
-            <a:ext cx="10762282" cy="5340409"/>
-          </a:xfrm>
-          <a:prstGeom prst="rect">
-            <a:avLst/>
-          </a:prstGeom>
-        </p:spPr>
-      </p:pic>
-      <p:sp>
-        <p:nvSpPr>
-          <p:cNvPr id="3" name="TextBox 3"/>
-          <p:cNvSpPr txBox="1"/>
-          <p:nvPr/>
-        </p:nvSpPr>
-        <p:spPr>
-          <a:xfrm>
-            <a:off x="1066800" y="266700"/>
-            <a:ext cx="6967016" cy="1640681"/>
-          </a:xfrm>
-          <a:prstGeom prst="rect">
-            <a:avLst/>
-          </a:prstGeom>
-        </p:spPr>
-        <p:txBody>
-          <a:bodyPr lIns="0" tIns="0" rIns="0" bIns="0" rtlCol="0" anchor="t">
-            <a:spAutoFit/>
-          </a:bodyPr>
-          <a:lstStyle/>
-          <a:p>
-            <a:pPr marL="0" lvl="0" indent="0" algn="l">
-              <a:lnSpc>
-                <a:spcPts val="6056"/>
-              </a:lnSpc>
-            </a:pPr>
-            <a:r>
-              <a:rPr lang="en-US" sz="6375" b="1" spc="-267" dirty="0">
-                <a:solidFill>
-                  <a:srgbClr val="F4F4F4"/>
-                </a:solidFill>
-                <a:latin typeface="Poppins Medium"/>
-                <a:ea typeface="Poppins Medium"/>
-                <a:cs typeface="Poppins Medium"/>
-                <a:sym typeface="Poppins Medium"/>
-              </a:rPr>
-              <a:t>Recommendation</a:t>
-            </a:r>
-          </a:p>
-          <a:p>
-            <a:pPr marL="0" lvl="0" indent="0" algn="l">
-              <a:lnSpc>
-                <a:spcPts val="6056"/>
-              </a:lnSpc>
-            </a:pPr>
-            <a:r>
-              <a:rPr lang="en-US" sz="6375" b="1" spc="-267" dirty="0">
-                <a:solidFill>
-                  <a:srgbClr val="F4F4F4"/>
-                </a:solidFill>
-                <a:latin typeface="Poppins Medium"/>
-                <a:ea typeface="Poppins Medium"/>
-                <a:cs typeface="Poppins Medium"/>
-                <a:sym typeface="Poppins Medium"/>
-              </a:rPr>
-              <a:t>Breakdown</a:t>
-            </a:r>
-          </a:p>
-        </p:txBody>
-      </p:sp>
-      <p:sp>
-        <p:nvSpPr>
-          <p:cNvPr id="12" name="TextBox 11">
-            <a:extLst>
-              <a:ext uri="{FF2B5EF4-FFF2-40B4-BE49-F238E27FC236}">
-                <a16:creationId xmlns:a16="http://schemas.microsoft.com/office/drawing/2014/main" id="{85AD5F09-69F8-1EC8-04DE-E68D4BD428D1}"/>
-              </a:ext>
-            </a:extLst>
-          </p:cNvPr>
-          <p:cNvSpPr txBox="1"/>
-          <p:nvPr/>
-        </p:nvSpPr>
-        <p:spPr>
-          <a:xfrm>
-            <a:off x="-11734800" y="9443249"/>
-            <a:ext cx="11283696" cy="830035"/>
-          </a:xfrm>
-          <a:prstGeom prst="rect">
-            <a:avLst/>
-          </a:prstGeom>
-          <a:noFill/>
-        </p:spPr>
-        <p:txBody>
-          <a:bodyPr wrap="square">
-            <a:spAutoFit/>
-          </a:bodyPr>
-          <a:lstStyle/>
-          <a:p>
-            <a:r>
-              <a:rPr lang="en-US" sz="1598" dirty="0">
-                <a:solidFill>
-                  <a:srgbClr val="F4F4F4"/>
-                </a:solidFill>
-                <a:latin typeface="Inter Extra-Light"/>
-                <a:ea typeface="Inter Extra-Light"/>
-                <a:cs typeface="Inter Extra-Light"/>
-                <a:sym typeface="Inter Extra-Light"/>
-              </a:rPr>
-              <a:t>Travelers in Business and First Class were more likely to recommend the airline, while Economy passengers showed the lowest recommendation rates. Recommendation rates also varied over time, with a noticeable decline in recent review periods, suggesting worsening passenger experience trends.</a:t>
-            </a:r>
-            <a:endParaRPr lang="en-PH" dirty="0"/>
           </a:p>
         </p:txBody>
       </p:sp>
@@ -14878,6 +16343,396 @@
             <a:tailEnd type="none" w="sm" len="sm"/>
           </a:ln>
         </p:spPr>
+        <p:txBody>
+          <a:bodyPr/>
+          <a:lstStyle/>
+          <a:p>
+            <a:endParaRPr lang="en-PH"/>
+          </a:p>
+        </p:txBody>
+      </p:sp>
+      <p:sp>
+        <p:nvSpPr>
+          <p:cNvPr id="4" name="TextBox 4"/>
+          <p:cNvSpPr txBox="1"/>
+          <p:nvPr/>
+        </p:nvSpPr>
+        <p:spPr>
+          <a:xfrm>
+            <a:off x="9144000" y="7048500"/>
+            <a:ext cx="7013136" cy="476284"/>
+          </a:xfrm>
+          <a:prstGeom prst="rect">
+            <a:avLst/>
+          </a:prstGeom>
+        </p:spPr>
+        <p:txBody>
+          <a:bodyPr wrap="square" lIns="0" tIns="0" rIns="0" bIns="0" rtlCol="0" anchor="t">
+            <a:spAutoFit/>
+          </a:bodyPr>
+          <a:lstStyle/>
+          <a:p>
+            <a:pPr marL="0" lvl="0" indent="0" algn="l">
+              <a:lnSpc>
+                <a:spcPts val="3947"/>
+              </a:lnSpc>
+              <a:spcBef>
+                <a:spcPct val="0"/>
+              </a:spcBef>
+            </a:pPr>
+            <a:r>
+              <a:rPr lang="en-US" sz="2819" spc="-118" dirty="0">
+                <a:solidFill>
+                  <a:srgbClr val="F4F4F4"/>
+                </a:solidFill>
+                <a:latin typeface="Poppins"/>
+                <a:ea typeface="Poppins"/>
+                <a:cs typeface="Poppins"/>
+                <a:sym typeface="Poppins"/>
+              </a:rPr>
+              <a:t>Yes vs. No Recommendation Patterns</a:t>
+            </a:r>
+          </a:p>
+        </p:txBody>
+      </p:sp>
+      <p:sp>
+        <p:nvSpPr>
+          <p:cNvPr id="5" name="TextBox 5"/>
+          <p:cNvSpPr txBox="1"/>
+          <p:nvPr/>
+        </p:nvSpPr>
+        <p:spPr>
+          <a:xfrm>
+            <a:off x="6934200" y="7880292"/>
+            <a:ext cx="10117367" cy="1692771"/>
+          </a:xfrm>
+          <a:prstGeom prst="rect">
+            <a:avLst/>
+          </a:prstGeom>
+        </p:spPr>
+        <p:txBody>
+          <a:bodyPr wrap="square" lIns="0" tIns="0" rIns="0" bIns="0" rtlCol="0" anchor="t">
+            <a:spAutoFit/>
+          </a:bodyPr>
+          <a:lstStyle/>
+          <a:p>
+            <a:pPr marL="0" lvl="0" indent="0" algn="just">
+              <a:lnSpc>
+                <a:spcPts val="2238"/>
+              </a:lnSpc>
+              <a:spcBef>
+                <a:spcPct val="0"/>
+              </a:spcBef>
+            </a:pPr>
+            <a:r>
+              <a:rPr lang="en-US" sz="2000" dirty="0">
+                <a:solidFill>
+                  <a:srgbClr val="F4F4F4"/>
+                </a:solidFill>
+                <a:latin typeface="Inter Extra-Light"/>
+                <a:ea typeface="Inter Extra-Light"/>
+                <a:cs typeface="Inter Extra-Light"/>
+                <a:sym typeface="Inter Extra-Light"/>
+              </a:rPr>
+              <a:t>Passengers were asked whether they would recommend Philippine Airlines. The majority responded No, indicating overall dissatisfaction. Travelers in Business and First Class were more likely to recommend the airline, while Economy passengers showed the lowest recommendation rates. Recommendation rates also varied over time, with a noticeable decline in recent review periods, suggesting worsening passenger experience trends.</a:t>
+            </a:r>
+          </a:p>
+        </p:txBody>
+      </p:sp>
+      <p:grpSp>
+        <p:nvGrpSpPr>
+          <p:cNvPr id="6" name="Group 6"/>
+          <p:cNvGrpSpPr/>
+          <p:nvPr/>
+        </p:nvGrpSpPr>
+        <p:grpSpPr>
+          <a:xfrm>
+            <a:off x="-4262394" y="795421"/>
+            <a:ext cx="9573334" cy="8229600"/>
+            <a:chOff x="0" y="0"/>
+            <a:chExt cx="1483160" cy="1274980"/>
+          </a:xfrm>
+        </p:grpSpPr>
+        <p:sp>
+          <p:nvSpPr>
+            <p:cNvPr id="7" name="Freeform 7"/>
+            <p:cNvSpPr/>
+            <p:nvPr/>
+          </p:nvSpPr>
+          <p:spPr>
+            <a:xfrm>
+              <a:off x="0" y="0"/>
+              <a:ext cx="1483160" cy="1274980"/>
+            </a:xfrm>
+            <a:custGeom>
+              <a:avLst/>
+              <a:gdLst/>
+              <a:ahLst/>
+              <a:cxnLst/>
+              <a:rect l="l" t="t" r="r" b="b"/>
+              <a:pathLst>
+                <a:path w="1483160" h="1274980">
+                  <a:moveTo>
+                    <a:pt x="49330" y="0"/>
+                  </a:moveTo>
+                  <a:lnTo>
+                    <a:pt x="1433829" y="0"/>
+                  </a:lnTo>
+                  <a:cubicBezTo>
+                    <a:pt x="1446913" y="0"/>
+                    <a:pt x="1459460" y="5197"/>
+                    <a:pt x="1468711" y="14449"/>
+                  </a:cubicBezTo>
+                  <a:cubicBezTo>
+                    <a:pt x="1477963" y="23700"/>
+                    <a:pt x="1483160" y="36247"/>
+                    <a:pt x="1483160" y="49330"/>
+                  </a:cubicBezTo>
+                  <a:lnTo>
+                    <a:pt x="1483160" y="1225650"/>
+                  </a:lnTo>
+                  <a:cubicBezTo>
+                    <a:pt x="1483160" y="1238733"/>
+                    <a:pt x="1477963" y="1251281"/>
+                    <a:pt x="1468711" y="1260532"/>
+                  </a:cubicBezTo>
+                  <a:cubicBezTo>
+                    <a:pt x="1459460" y="1269783"/>
+                    <a:pt x="1446913" y="1274980"/>
+                    <a:pt x="1433829" y="1274980"/>
+                  </a:cubicBezTo>
+                  <a:lnTo>
+                    <a:pt x="49330" y="1274980"/>
+                  </a:lnTo>
+                  <a:cubicBezTo>
+                    <a:pt x="36247" y="1274980"/>
+                    <a:pt x="23700" y="1269783"/>
+                    <a:pt x="14449" y="1260532"/>
+                  </a:cubicBezTo>
+                  <a:cubicBezTo>
+                    <a:pt x="5197" y="1251281"/>
+                    <a:pt x="0" y="1238733"/>
+                    <a:pt x="0" y="1225650"/>
+                  </a:cubicBezTo>
+                  <a:lnTo>
+                    <a:pt x="0" y="49330"/>
+                  </a:lnTo>
+                  <a:cubicBezTo>
+                    <a:pt x="0" y="36247"/>
+                    <a:pt x="5197" y="23700"/>
+                    <a:pt x="14449" y="14449"/>
+                  </a:cubicBezTo>
+                  <a:cubicBezTo>
+                    <a:pt x="23700" y="5197"/>
+                    <a:pt x="36247" y="0"/>
+                    <a:pt x="49330" y="0"/>
+                  </a:cubicBezTo>
+                  <a:close/>
+                </a:path>
+              </a:pathLst>
+            </a:custGeom>
+            <a:blipFill>
+              <a:blip r:embed="rId2"/>
+              <a:stretch>
+                <a:fillRect l="-197" r="-197"/>
+              </a:stretch>
+            </a:blipFill>
+            <a:ln w="9525" cap="rnd">
+              <a:solidFill>
+                <a:srgbClr val="FFFFFF"/>
+              </a:solidFill>
+              <a:prstDash val="solid"/>
+              <a:round/>
+            </a:ln>
+          </p:spPr>
+          <p:txBody>
+            <a:bodyPr/>
+            <a:lstStyle/>
+            <a:p>
+              <a:endParaRPr lang="en-PH"/>
+            </a:p>
+          </p:txBody>
+        </p:sp>
+      </p:grpSp>
+      <p:pic>
+        <p:nvPicPr>
+          <p:cNvPr id="9" name="Picture 8">
+            <a:extLst>
+              <a:ext uri="{FF2B5EF4-FFF2-40B4-BE49-F238E27FC236}">
+                <a16:creationId xmlns:a16="http://schemas.microsoft.com/office/drawing/2014/main" id="{B294938F-E370-393A-13CC-EAA0D9EA0A51}"/>
+              </a:ext>
+            </a:extLst>
+          </p:cNvPr>
+          <p:cNvPicPr>
+            <a:picLocks noChangeAspect="1"/>
+          </p:cNvPicPr>
+          <p:nvPr/>
+        </p:nvPicPr>
+        <p:blipFill>
+          <a:blip r:embed="rId3">
+            <a:extLst>
+              <a:ext uri="{28A0092B-C50C-407E-A947-70E740481C1C}">
+                <a14:useLocalDpi xmlns:a14="http://schemas.microsoft.com/office/drawing/2010/main" val="0"/>
+              </a:ext>
+            </a:extLst>
+          </a:blip>
+          <a:stretch>
+            <a:fillRect/>
+          </a:stretch>
+        </p:blipFill>
+        <p:spPr>
+          <a:xfrm>
+            <a:off x="7044156" y="1403291"/>
+            <a:ext cx="10762282" cy="5340409"/>
+          </a:xfrm>
+          <a:prstGeom prst="rect">
+            <a:avLst/>
+          </a:prstGeom>
+        </p:spPr>
+      </p:pic>
+      <p:sp>
+        <p:nvSpPr>
+          <p:cNvPr id="3" name="TextBox 3"/>
+          <p:cNvSpPr txBox="1"/>
+          <p:nvPr/>
+        </p:nvSpPr>
+        <p:spPr>
+          <a:xfrm>
+            <a:off x="1066800" y="266700"/>
+            <a:ext cx="6967016" cy="1640681"/>
+          </a:xfrm>
+          <a:prstGeom prst="rect">
+            <a:avLst/>
+          </a:prstGeom>
+        </p:spPr>
+        <p:txBody>
+          <a:bodyPr lIns="0" tIns="0" rIns="0" bIns="0" rtlCol="0" anchor="t">
+            <a:spAutoFit/>
+          </a:bodyPr>
+          <a:lstStyle/>
+          <a:p>
+            <a:pPr marL="0" lvl="0" indent="0" algn="l">
+              <a:lnSpc>
+                <a:spcPts val="6056"/>
+              </a:lnSpc>
+            </a:pPr>
+            <a:r>
+              <a:rPr lang="en-US" sz="6375" b="1" spc="-267" dirty="0">
+                <a:solidFill>
+                  <a:srgbClr val="F4F4F4"/>
+                </a:solidFill>
+                <a:latin typeface="Poppins Medium"/>
+                <a:ea typeface="Poppins Medium"/>
+                <a:cs typeface="Poppins Medium"/>
+                <a:sym typeface="Poppins Medium"/>
+              </a:rPr>
+              <a:t>Recommendation</a:t>
+            </a:r>
+          </a:p>
+          <a:p>
+            <a:pPr marL="0" lvl="0" indent="0" algn="l">
+              <a:lnSpc>
+                <a:spcPts val="6056"/>
+              </a:lnSpc>
+            </a:pPr>
+            <a:r>
+              <a:rPr lang="en-US" sz="6375" b="1" spc="-267" dirty="0">
+                <a:solidFill>
+                  <a:srgbClr val="F4F4F4"/>
+                </a:solidFill>
+                <a:latin typeface="Poppins Medium"/>
+                <a:ea typeface="Poppins Medium"/>
+                <a:cs typeface="Poppins Medium"/>
+                <a:sym typeface="Poppins Medium"/>
+              </a:rPr>
+              <a:t>Breakdown</a:t>
+            </a:r>
+          </a:p>
+        </p:txBody>
+      </p:sp>
+    </p:spTree>
+  </p:cSld>
+  <p:clrMapOvr>
+    <a:masterClrMapping/>
+  </p:clrMapOvr>
+</p:sld>
+</file>
+
+<file path=ppt/slides/slide6.xml><?xml version="1.0" encoding="utf-8"?>
+<p:sld xmlns:a="http://schemas.openxmlformats.org/drawingml/2006/main" xmlns:r="http://schemas.openxmlformats.org/officeDocument/2006/relationships" xmlns:p="http://schemas.openxmlformats.org/presentationml/2006/main">
+  <p:cSld>
+    <p:bg>
+      <p:bgPr>
+        <a:gradFill rotWithShape="1">
+          <a:gsLst>
+            <a:gs pos="0">
+              <a:srgbClr val="6B1124">
+                <a:alpha val="100000"/>
+              </a:srgbClr>
+            </a:gs>
+            <a:gs pos="50000">
+              <a:srgbClr val="000000">
+                <a:alpha val="100000"/>
+              </a:srgbClr>
+            </a:gs>
+            <a:gs pos="100000">
+              <a:srgbClr val="6B1124">
+                <a:alpha val="100000"/>
+              </a:srgbClr>
+            </a:gs>
+          </a:gsLst>
+          <a:path path="circle">
+            <a:fillToRect r="100000" b="100000"/>
+          </a:path>
+          <a:tileRect l="-100000" t="-100000"/>
+        </a:gradFill>
+        <a:effectLst/>
+      </p:bgPr>
+    </p:bg>
+    <p:spTree>
+      <p:nvGrpSpPr>
+        <p:cNvPr id="1" name=""/>
+        <p:cNvGrpSpPr/>
+        <p:nvPr/>
+      </p:nvGrpSpPr>
+      <p:grpSpPr>
+        <a:xfrm>
+          <a:off x="0" y="0"/>
+          <a:ext cx="0" cy="0"/>
+          <a:chOff x="0" y="0"/>
+          <a:chExt cx="0" cy="0"/>
+        </a:xfrm>
+      </p:grpSpPr>
+      <p:sp>
+        <p:nvSpPr>
+          <p:cNvPr id="2" name="AutoShape 2"/>
+          <p:cNvSpPr/>
+          <p:nvPr/>
+        </p:nvSpPr>
+        <p:spPr>
+          <a:xfrm flipV="1">
+            <a:off x="0" y="5143500"/>
+            <a:ext cx="18288000" cy="0"/>
+          </a:xfrm>
+          <a:prstGeom prst="line">
+            <a:avLst/>
+          </a:prstGeom>
+          <a:ln w="9525" cap="rnd">
+            <a:solidFill>
+              <a:srgbClr val="F4F4F4"/>
+            </a:solidFill>
+            <a:prstDash val="solid"/>
+            <a:headEnd type="none" w="sm" len="sm"/>
+            <a:tailEnd type="none" w="sm" len="sm"/>
+          </a:ln>
+        </p:spPr>
+        <p:txBody>
+          <a:bodyPr/>
+          <a:lstStyle/>
+          <a:p>
+            <a:endParaRPr lang="en-PH"/>
+          </a:p>
+        </p:txBody>
       </p:sp>
       <p:sp>
         <p:nvSpPr>
@@ -14958,7 +16813,7 @@
 </p:sld>
 </file>
 
-<file path=ppt/slides/slide6.xml><?xml version="1.0" encoding="utf-8"?>
+<file path=ppt/slides/slide7.xml><?xml version="1.0" encoding="utf-8"?>
 <p:sld xmlns:a="http://schemas.openxmlformats.org/drawingml/2006/main" xmlns:r="http://schemas.openxmlformats.org/officeDocument/2006/relationships" xmlns:p="http://schemas.openxmlformats.org/presentationml/2006/main">
   <p:cSld>
     <p:bg>
@@ -15026,64 +16881,11 @@
             <a:tailEnd type="none" w="sm" len="sm"/>
           </a:ln>
         </p:spPr>
-      </p:sp>
-      <p:sp>
-        <p:nvSpPr>
-          <p:cNvPr id="3" name="TextBox 3"/>
-          <p:cNvSpPr txBox="1"/>
-          <p:nvPr/>
-        </p:nvSpPr>
-        <p:spPr>
-          <a:xfrm>
-            <a:off x="862133" y="8103552"/>
-            <a:ext cx="7041070" cy="2214372"/>
-          </a:xfrm>
-          <a:prstGeom prst="rect">
-            <a:avLst/>
-          </a:prstGeom>
-        </p:spPr>
         <p:txBody>
-          <a:bodyPr lIns="0" tIns="0" rIns="0" bIns="0" rtlCol="0" anchor="t">
-            <a:spAutoFit/>
-          </a:bodyPr>
+          <a:bodyPr/>
           <a:lstStyle/>
           <a:p>
-            <a:pPr marL="0" lvl="0" indent="0" algn="l">
-              <a:lnSpc>
-                <a:spcPts val="8116"/>
-              </a:lnSpc>
-            </a:pPr>
-            <a:r>
-              <a:rPr lang="en-US" sz="8544" b="1" spc="-358" dirty="0">
-                <a:solidFill>
-                  <a:srgbClr val="F4F4F4"/>
-                </a:solidFill>
-                <a:latin typeface="Poppins Medium"/>
-                <a:ea typeface="Poppins Medium"/>
-                <a:cs typeface="Poppins Medium"/>
-                <a:sym typeface="Poppins Medium"/>
-              </a:rPr>
-              <a:t>Correlation</a:t>
-            </a:r>
-          </a:p>
-          <a:p>
-            <a:pPr marL="0" lvl="0" indent="0" algn="l">
-              <a:lnSpc>
-                <a:spcPts val="8116"/>
-              </a:lnSpc>
-            </a:pPr>
-            <a:r>
-              <a:rPr lang="en-US" sz="8544" b="1" spc="-358" dirty="0">
-                <a:solidFill>
-                  <a:srgbClr val="F4F4F4"/>
-                </a:solidFill>
-                <a:latin typeface="Poppins Medium"/>
-                <a:ea typeface="Poppins Medium"/>
-                <a:cs typeface="Poppins Medium"/>
-                <a:sym typeface="Poppins Medium"/>
-              </a:rPr>
-              <a:t>Heatmap</a:t>
-            </a:r>
+            <a:endParaRPr lang="en-PH"/>
           </a:p>
         </p:txBody>
       </p:sp>
@@ -15095,15 +16897,15 @@
         </p:nvSpPr>
         <p:spPr>
           <a:xfrm>
-            <a:off x="10292284" y="7051791"/>
-            <a:ext cx="6967016" cy="509411"/>
+            <a:off x="6400800" y="7945453"/>
+            <a:ext cx="10624616" cy="476284"/>
           </a:xfrm>
           <a:prstGeom prst="rect">
             <a:avLst/>
           </a:prstGeom>
         </p:spPr>
         <p:txBody>
-          <a:bodyPr lIns="0" tIns="0" rIns="0" bIns="0" rtlCol="0" anchor="t">
+          <a:bodyPr wrap="square" lIns="0" tIns="0" rIns="0" bIns="0" rtlCol="0" anchor="t">
             <a:spAutoFit/>
           </a:bodyPr>
           <a:lstStyle/>
@@ -15139,15 +16941,15 @@
         </p:nvSpPr>
         <p:spPr>
           <a:xfrm>
-            <a:off x="10292284" y="8103552"/>
-            <a:ext cx="6967016" cy="945782"/>
+            <a:off x="2438400" y="8736812"/>
+            <a:ext cx="13139216" cy="731482"/>
           </a:xfrm>
           <a:prstGeom prst="rect">
             <a:avLst/>
           </a:prstGeom>
         </p:spPr>
         <p:txBody>
-          <a:bodyPr lIns="0" tIns="0" rIns="0" bIns="0" rtlCol="0" anchor="t">
+          <a:bodyPr wrap="square" lIns="0" tIns="0" rIns="0" bIns="0" rtlCol="0" anchor="t">
             <a:spAutoFit/>
           </a:bodyPr>
           <a:lstStyle/>
@@ -15161,7 +16963,7 @@
               </a:spcBef>
             </a:pPr>
             <a:r>
-              <a:rPr lang="en-US" sz="1389" dirty="0">
+              <a:rPr lang="en-US" sz="2000" dirty="0">
                 <a:solidFill>
                   <a:srgbClr val="F4F4F4"/>
                 </a:solidFill>
@@ -15177,10 +16979,10 @@
       </p:sp>
       <p:pic>
         <p:nvPicPr>
-          <p:cNvPr id="9" name="Picture 8">
+          <p:cNvPr id="7" name="Picture 6">
             <a:extLst>
               <a:ext uri="{FF2B5EF4-FFF2-40B4-BE49-F238E27FC236}">
-                <a16:creationId xmlns:a16="http://schemas.microsoft.com/office/drawing/2014/main" id="{CC134FC4-D81E-7408-7E38-02B2E4778D92}"/>
+                <a16:creationId xmlns:a16="http://schemas.microsoft.com/office/drawing/2014/main" id="{D410EDBA-3F3B-1071-A075-72FCB2327DBF}"/>
               </a:ext>
             </a:extLst>
           </p:cNvPr>
@@ -15190,101 +16992,15 @@
           <p:nvPr/>
         </p:nvPicPr>
         <p:blipFill>
-          <a:blip r:embed="rId3">
-            <a:extLst>
-              <a:ext uri="{28A0092B-C50C-407E-A947-70E740481C1C}">
-                <a14:useLocalDpi xmlns:a14="http://schemas.microsoft.com/office/drawing/2010/main" val="0"/>
-              </a:ext>
-            </a:extLst>
-          </a:blip>
+          <a:blip r:embed="rId3"/>
           <a:stretch>
             <a:fillRect/>
           </a:stretch>
         </p:blipFill>
         <p:spPr>
           <a:xfrm>
-            <a:off x="862133" y="650492"/>
-            <a:ext cx="6848613" cy="3731008"/>
-          </a:xfrm>
-          <a:prstGeom prst="rect">
-            <a:avLst/>
-          </a:prstGeom>
-        </p:spPr>
-      </p:pic>
-      <p:sp>
-        <p:nvSpPr>
-          <p:cNvPr id="11" name="TextBox 5">
-            <a:extLst>
-              <a:ext uri="{FF2B5EF4-FFF2-40B4-BE49-F238E27FC236}">
-                <a16:creationId xmlns:a16="http://schemas.microsoft.com/office/drawing/2014/main" id="{3BE8D3D4-D95F-79B7-26B1-3EA7606DAD3F}"/>
-              </a:ext>
-            </a:extLst>
-          </p:cNvPr>
-          <p:cNvSpPr txBox="1"/>
-          <p:nvPr/>
-        </p:nvSpPr>
-        <p:spPr>
-          <a:xfrm>
-            <a:off x="936187" y="5274396"/>
-            <a:ext cx="6967016" cy="1687321"/>
-          </a:xfrm>
-          <a:prstGeom prst="rect">
-            <a:avLst/>
-          </a:prstGeom>
-        </p:spPr>
-        <p:txBody>
-          <a:bodyPr lIns="0" tIns="0" rIns="0" bIns="0" rtlCol="0" anchor="t">
-            <a:spAutoFit/>
-          </a:bodyPr>
-          <a:lstStyle/>
-          <a:p>
-            <a:pPr marL="0" lvl="0" indent="0" algn="just">
-              <a:lnSpc>
-                <a:spcPts val="1945"/>
-              </a:lnSpc>
-              <a:spcBef>
-                <a:spcPct val="0"/>
-              </a:spcBef>
-            </a:pPr>
-            <a:r>
-              <a:rPr lang="en-US" sz="1389" dirty="0">
-                <a:solidFill>
-                  <a:srgbClr val="F4F4F4"/>
-                </a:solidFill>
-                <a:latin typeface="Inter Extra-Light"/>
-                <a:ea typeface="Inter Extra-Light"/>
-                <a:cs typeface="Inter Extra-Light"/>
-                <a:sym typeface="Inter Extra-Light"/>
-              </a:rPr>
-              <a:t>The heatmap shows that airline service ratings varied across categories and time. Cabin staff service and seat comfort consistently scored higher, suggesting passengers valued these aspects most. In contrast, food, beverages, and inflight entertainment often lagged, reflecting weaker satisfaction in non‑essential services. Notably, ratings dipped around mid‑2020, likely due to pandemic disruptions, but recovered by late 2021–2022, with improvements in ground service and value for money indicating renewed customer confidence.</a:t>
-            </a:r>
-          </a:p>
-        </p:txBody>
-      </p:sp>
-      <p:pic>
-        <p:nvPicPr>
-          <p:cNvPr id="12" name="Picture 11">
-            <a:extLst>
-              <a:ext uri="{FF2B5EF4-FFF2-40B4-BE49-F238E27FC236}">
-                <a16:creationId xmlns:a16="http://schemas.microsoft.com/office/drawing/2014/main" id="{09B587A3-31A9-B003-3B8F-5FD5711128CC}"/>
-              </a:ext>
-            </a:extLst>
-          </p:cNvPr>
-          <p:cNvPicPr>
-            <a:picLocks noChangeAspect="1"/>
-          </p:cNvPicPr>
-          <p:nvPr/>
-        </p:nvPicPr>
-        <p:blipFill>
-          <a:blip r:embed="rId4"/>
-          <a:stretch>
-            <a:fillRect/>
-          </a:stretch>
-        </p:blipFill>
-        <p:spPr>
-          <a:xfrm>
-            <a:off x="9144000" y="625435"/>
-            <a:ext cx="8351540" cy="5997924"/>
+            <a:off x="3221702" y="1184447"/>
+            <a:ext cx="11844596" cy="6411295"/>
           </a:xfrm>
           <a:prstGeom prst="rect">
             <a:avLst/>
@@ -15299,7 +17015,189 @@
 </p:sld>
 </file>
 
-<file path=ppt/slides/slide7.xml><?xml version="1.0" encoding="utf-8"?>
+<file path=ppt/slides/slide8.xml><?xml version="1.0" encoding="utf-8"?>
+<p:sld xmlns:a="http://schemas.openxmlformats.org/drawingml/2006/main" xmlns:r="http://schemas.openxmlformats.org/officeDocument/2006/relationships" xmlns:p="http://schemas.openxmlformats.org/presentationml/2006/main">
+  <p:cSld>
+    <p:bg>
+      <p:bgPr>
+        <a:gradFill rotWithShape="1">
+          <a:gsLst>
+            <a:gs pos="0">
+              <a:srgbClr val="6B1124">
+                <a:alpha val="100000"/>
+              </a:srgbClr>
+            </a:gs>
+            <a:gs pos="50000">
+              <a:srgbClr val="000000">
+                <a:alpha val="100000"/>
+              </a:srgbClr>
+            </a:gs>
+            <a:gs pos="100000">
+              <a:srgbClr val="6B1124">
+                <a:alpha val="100000"/>
+              </a:srgbClr>
+            </a:gs>
+          </a:gsLst>
+          <a:path path="circle">
+            <a:fillToRect r="100000" b="100000"/>
+          </a:path>
+          <a:tileRect l="-100000" t="-100000"/>
+        </a:gradFill>
+        <a:effectLst/>
+      </p:bgPr>
+    </p:bg>
+    <p:spTree>
+      <p:nvGrpSpPr>
+        <p:cNvPr id="1" name="">
+          <a:extLst>
+            <a:ext uri="{FF2B5EF4-FFF2-40B4-BE49-F238E27FC236}">
+              <a16:creationId xmlns:a16="http://schemas.microsoft.com/office/drawing/2014/main" id="{201FB33A-2F0C-6F76-1270-E1D264F32E13}"/>
+            </a:ext>
+          </a:extLst>
+        </p:cNvPr>
+        <p:cNvGrpSpPr/>
+        <p:nvPr/>
+      </p:nvGrpSpPr>
+      <p:grpSpPr>
+        <a:xfrm>
+          <a:off x="0" y="0"/>
+          <a:ext cx="0" cy="0"/>
+          <a:chOff x="0" y="0"/>
+          <a:chExt cx="0" cy="0"/>
+        </a:xfrm>
+      </p:grpSpPr>
+      <p:sp>
+        <p:nvSpPr>
+          <p:cNvPr id="2" name="AutoShape 2">
+            <a:extLst>
+              <a:ext uri="{FF2B5EF4-FFF2-40B4-BE49-F238E27FC236}">
+                <a16:creationId xmlns:a16="http://schemas.microsoft.com/office/drawing/2014/main" id="{94950974-0BE3-B658-5EE1-987E50EBF499}"/>
+              </a:ext>
+            </a:extLst>
+          </p:cNvPr>
+          <p:cNvSpPr/>
+          <p:nvPr/>
+        </p:nvSpPr>
+        <p:spPr>
+          <a:xfrm flipV="1">
+            <a:off x="0" y="3624397"/>
+            <a:ext cx="18288000" cy="0"/>
+          </a:xfrm>
+          <a:prstGeom prst="line">
+            <a:avLst/>
+          </a:prstGeom>
+          <a:ln w="9525" cap="rnd">
+            <a:solidFill>
+              <a:srgbClr val="F4F4F4"/>
+            </a:solidFill>
+            <a:prstDash val="solid"/>
+            <a:headEnd type="none" w="sm" len="sm"/>
+            <a:tailEnd type="none" w="sm" len="sm"/>
+          </a:ln>
+        </p:spPr>
+        <p:txBody>
+          <a:bodyPr/>
+          <a:lstStyle/>
+          <a:p>
+            <a:endParaRPr lang="en-PH"/>
+          </a:p>
+        </p:txBody>
+      </p:sp>
+      <p:pic>
+        <p:nvPicPr>
+          <p:cNvPr id="10" name="Picture 9">
+            <a:extLst>
+              <a:ext uri="{FF2B5EF4-FFF2-40B4-BE49-F238E27FC236}">
+                <a16:creationId xmlns:a16="http://schemas.microsoft.com/office/drawing/2014/main" id="{11C18A29-C091-F67B-F5F3-430FCB2F9915}"/>
+              </a:ext>
+            </a:extLst>
+          </p:cNvPr>
+          <p:cNvPicPr>
+            <a:picLocks noChangeAspect="1"/>
+          </p:cNvPicPr>
+          <p:nvPr/>
+        </p:nvPicPr>
+        <p:blipFill>
+          <a:blip r:embed="rId3"/>
+          <a:stretch>
+            <a:fillRect/>
+          </a:stretch>
+        </p:blipFill>
+        <p:spPr>
+          <a:xfrm>
+            <a:off x="2895600" y="876300"/>
+            <a:ext cx="11480034" cy="6254127"/>
+          </a:xfrm>
+          <a:prstGeom prst="rect">
+            <a:avLst/>
+          </a:prstGeom>
+        </p:spPr>
+      </p:pic>
+      <p:sp>
+        <p:nvSpPr>
+          <p:cNvPr id="8" name="TextBox 7">
+            <a:extLst>
+              <a:ext uri="{FF2B5EF4-FFF2-40B4-BE49-F238E27FC236}">
+                <a16:creationId xmlns:a16="http://schemas.microsoft.com/office/drawing/2014/main" id="{B57EAE5E-9881-E49B-578C-B14A46A1A94E}"/>
+              </a:ext>
+            </a:extLst>
+          </p:cNvPr>
+          <p:cNvSpPr txBox="1"/>
+          <p:nvPr/>
+        </p:nvSpPr>
+        <p:spPr>
+          <a:xfrm>
+            <a:off x="1905000" y="7353300"/>
+            <a:ext cx="13944600" cy="2346668"/>
+          </a:xfrm>
+          <a:prstGeom prst="rect">
+            <a:avLst/>
+          </a:prstGeom>
+          <a:noFill/>
+        </p:spPr>
+        <p:txBody>
+          <a:bodyPr wrap="square">
+            <a:spAutoFit/>
+          </a:bodyPr>
+          <a:lstStyle/>
+          <a:p>
+            <a:pPr algn="just">
+              <a:lnSpc>
+                <a:spcPct val="150000"/>
+              </a:lnSpc>
+              <a:spcBef>
+                <a:spcPct val="0"/>
+              </a:spcBef>
+            </a:pPr>
+            <a:r>
+              <a:rPr lang="en-US" sz="2000" dirty="0">
+                <a:solidFill>
+                  <a:srgbClr val="F4F4F4"/>
+                </a:solidFill>
+                <a:latin typeface="Inter Extra-Light"/>
+                <a:ea typeface="Inter Extra-Light"/>
+                <a:cs typeface="Inter Extra-Light"/>
+                <a:sym typeface="Inter Extra-Light"/>
+              </a:rPr>
+              <a:t>The heatmap shows that airline service ratings varied across categories and time. Cabin staff service and seat comfort consistently scored higher, suggesting passengers valued these aspects most. In contrast, food, beverages, and inflight entertainment often lagged, reflecting weaker satisfaction in non‑essential services. Notably, ratings dipped around mid‑2020, likely due to pandemic disruptions, but recovered by late 2021–2022, with improvements in ground service and value for money indicating renewed customer confidence.</a:t>
+            </a:r>
+          </a:p>
+        </p:txBody>
+      </p:sp>
+    </p:spTree>
+    <p:extLst>
+      <p:ext uri="{BB962C8B-B14F-4D97-AF65-F5344CB8AC3E}">
+        <p14:creationId xmlns:p14="http://schemas.microsoft.com/office/powerpoint/2010/main" val="3708239574"/>
+      </p:ext>
+    </p:extLst>
+  </p:cSld>
+  <p:clrMapOvr>
+    <a:masterClrMapping/>
+  </p:clrMapOvr>
+</p:sld>
+</file>
+
+<file path=ppt/slides/slide9.xml><?xml version="1.0" encoding="utf-8"?>
 <p:sld xmlns:a="http://schemas.openxmlformats.org/drawingml/2006/main" xmlns:r="http://schemas.openxmlformats.org/officeDocument/2006/relationships" xmlns:p="http://schemas.openxmlformats.org/presentationml/2006/main">
   <p:cSld>
     <p:bg>
@@ -15367,6 +17265,13 @@
             <a:tailEnd type="none" w="sm" len="sm"/>
           </a:ln>
         </p:spPr>
+        <p:txBody>
+          <a:bodyPr/>
+          <a:lstStyle/>
+          <a:p>
+            <a:endParaRPr lang="en-PH"/>
+          </a:p>
+        </p:txBody>
       </p:sp>
       <p:grpSp>
         <p:nvGrpSpPr>
@@ -15453,7 +17358,7 @@
                 </a:spcBef>
               </a:pPr>
               <a:r>
-                <a:rPr lang="en-US" sz="2819" spc="-118" dirty="0">
+                <a:rPr lang="en-US" sz="2819" spc="-118">
                   <a:solidFill>
                     <a:srgbClr val="F4F4F4"/>
                   </a:solidFill>
@@ -15543,561 +17448,6 @@
         </p:spPr>
       </p:pic>
     </p:spTree>
-  </p:cSld>
-  <p:clrMapOvr>
-    <a:masterClrMapping/>
-  </p:clrMapOvr>
-</p:sld>
-</file>
-
-<file path=ppt/slides/slide8.xml><?xml version="1.0" encoding="utf-8"?>
-<p:sld xmlns:a="http://schemas.openxmlformats.org/drawingml/2006/main" xmlns:r="http://schemas.openxmlformats.org/officeDocument/2006/relationships" xmlns:p="http://schemas.openxmlformats.org/presentationml/2006/main">
-  <p:cSld>
-    <p:bg>
-      <p:bgPr>
-        <a:gradFill rotWithShape="1">
-          <a:gsLst>
-            <a:gs pos="0">
-              <a:srgbClr val="6B1124">
-                <a:alpha val="100000"/>
-              </a:srgbClr>
-            </a:gs>
-            <a:gs pos="50000">
-              <a:srgbClr val="000000">
-                <a:alpha val="100000"/>
-              </a:srgbClr>
-            </a:gs>
-            <a:gs pos="100000">
-              <a:srgbClr val="6B1124">
-                <a:alpha val="100000"/>
-              </a:srgbClr>
-            </a:gs>
-          </a:gsLst>
-          <a:path path="circle">
-            <a:fillToRect r="100000" b="100000"/>
-          </a:path>
-          <a:tileRect l="-100000" t="-100000"/>
-        </a:gradFill>
-        <a:effectLst/>
-      </p:bgPr>
-    </p:bg>
-    <p:spTree>
-      <p:nvGrpSpPr>
-        <p:cNvPr id="1" name=""/>
-        <p:cNvGrpSpPr/>
-        <p:nvPr/>
-      </p:nvGrpSpPr>
-      <p:grpSpPr>
-        <a:xfrm>
-          <a:off x="0" y="0"/>
-          <a:ext cx="0" cy="0"/>
-          <a:chOff x="0" y="0"/>
-          <a:chExt cx="0" cy="0"/>
-        </a:xfrm>
-      </p:grpSpPr>
-      <p:sp>
-        <p:nvSpPr>
-          <p:cNvPr id="2" name="AutoShape 2"/>
-          <p:cNvSpPr/>
-          <p:nvPr/>
-        </p:nvSpPr>
-        <p:spPr>
-          <a:xfrm flipV="1">
-            <a:off x="0" y="5143500"/>
-            <a:ext cx="18288000" cy="0"/>
-          </a:xfrm>
-          <a:prstGeom prst="line">
-            <a:avLst/>
-          </a:prstGeom>
-          <a:ln w="9525" cap="rnd">
-            <a:solidFill>
-              <a:srgbClr val="F4F4F4"/>
-            </a:solidFill>
-            <a:prstDash val="solid"/>
-            <a:headEnd type="none" w="sm" len="sm"/>
-            <a:tailEnd type="none" w="sm" len="sm"/>
-          </a:ln>
-        </p:spPr>
-      </p:sp>
-      <p:grpSp>
-        <p:nvGrpSpPr>
-          <p:cNvPr id="3" name="Group 3"/>
-          <p:cNvGrpSpPr/>
-          <p:nvPr/>
-        </p:nvGrpSpPr>
-        <p:grpSpPr>
-          <a:xfrm>
-            <a:off x="1028700" y="1690835"/>
-            <a:ext cx="8839378" cy="6648234"/>
-            <a:chOff x="0" y="0"/>
-            <a:chExt cx="11785838" cy="8864312"/>
-          </a:xfrm>
-        </p:grpSpPr>
-        <p:sp>
-          <p:nvSpPr>
-            <p:cNvPr id="4" name="TextBox 4"/>
-            <p:cNvSpPr txBox="1"/>
-            <p:nvPr/>
-          </p:nvSpPr>
-          <p:spPr>
-            <a:xfrm>
-              <a:off x="0" y="114300"/>
-              <a:ext cx="11785838" cy="1619250"/>
-            </a:xfrm>
-            <a:prstGeom prst="rect">
-              <a:avLst/>
-            </a:prstGeom>
-          </p:spPr>
-          <p:txBody>
-            <a:bodyPr lIns="0" tIns="0" rIns="0" bIns="0" rtlCol="0" anchor="t">
-              <a:spAutoFit/>
-            </a:bodyPr>
-            <a:lstStyle/>
-            <a:p>
-              <a:pPr marL="0" lvl="0" indent="0" algn="l">
-                <a:lnSpc>
-                  <a:spcPts val="8122"/>
-                </a:lnSpc>
-              </a:pPr>
-              <a:r>
-                <a:rPr lang="en-US" sz="8550" b="1" spc="-359">
-                  <a:solidFill>
-                    <a:srgbClr val="F4F4F4"/>
-                  </a:solidFill>
-                  <a:latin typeface="Poppins Medium"/>
-                  <a:ea typeface="Poppins Medium"/>
-                  <a:cs typeface="Poppins Medium"/>
-                  <a:sym typeface="Poppins Medium"/>
-                </a:rPr>
-                <a:t>Route Analysis</a:t>
-              </a:r>
-            </a:p>
-          </p:txBody>
-        </p:sp>
-        <p:sp>
-          <p:nvSpPr>
-            <p:cNvPr id="5" name="TextBox 5"/>
-            <p:cNvSpPr txBox="1"/>
-            <p:nvPr/>
-          </p:nvSpPr>
-          <p:spPr>
-            <a:xfrm>
-              <a:off x="0" y="4636321"/>
-              <a:ext cx="9289355" cy="1311040"/>
-            </a:xfrm>
-            <a:prstGeom prst="rect">
-              <a:avLst/>
-            </a:prstGeom>
-          </p:spPr>
-          <p:txBody>
-            <a:bodyPr lIns="0" tIns="0" rIns="0" bIns="0" rtlCol="0" anchor="t">
-              <a:spAutoFit/>
-            </a:bodyPr>
-            <a:lstStyle/>
-            <a:p>
-              <a:pPr marL="0" lvl="0" indent="0" algn="l">
-                <a:lnSpc>
-                  <a:spcPts val="3947"/>
-                </a:lnSpc>
-                <a:spcBef>
-                  <a:spcPct val="0"/>
-                </a:spcBef>
-              </a:pPr>
-              <a:r>
-                <a:rPr lang="en-US" sz="2819" spc="-118">
-                  <a:solidFill>
-                    <a:srgbClr val="F4F4F4"/>
-                  </a:solidFill>
-                  <a:latin typeface="Poppins"/>
-                  <a:ea typeface="Poppins"/>
-                  <a:cs typeface="Poppins"/>
-                  <a:sym typeface="Poppins"/>
-                </a:rPr>
-                <a:t>Seat Comfort by Route &amp; Top Aircraft Performance</a:t>
-              </a:r>
-            </a:p>
-          </p:txBody>
-        </p:sp>
-        <p:sp>
-          <p:nvSpPr>
-            <p:cNvPr id="6" name="TextBox 6"/>
-            <p:cNvSpPr txBox="1"/>
-            <p:nvPr/>
-          </p:nvSpPr>
-          <p:spPr>
-            <a:xfrm>
-              <a:off x="0" y="6670561"/>
-              <a:ext cx="9289355" cy="2193752"/>
-            </a:xfrm>
-            <a:prstGeom prst="rect">
-              <a:avLst/>
-            </a:prstGeom>
-          </p:spPr>
-          <p:txBody>
-            <a:bodyPr lIns="0" tIns="0" rIns="0" bIns="0" rtlCol="0" anchor="t">
-              <a:spAutoFit/>
-            </a:bodyPr>
-            <a:lstStyle/>
-            <a:p>
-              <a:pPr marL="0" lvl="0" indent="0" algn="just">
-                <a:lnSpc>
-                  <a:spcPts val="2238"/>
-                </a:lnSpc>
-                <a:spcBef>
-                  <a:spcPct val="0"/>
-                </a:spcBef>
-              </a:pPr>
-              <a:r>
-                <a:rPr lang="en-US" sz="1598" dirty="0">
-                  <a:solidFill>
-                    <a:srgbClr val="F4F4F4"/>
-                  </a:solidFill>
-                  <a:latin typeface="Inter Extra-Light"/>
-                  <a:ea typeface="Inter Extra-Light"/>
-                  <a:cs typeface="Inter Extra-Light"/>
-                  <a:sym typeface="Inter Extra-Light"/>
-                </a:rPr>
-                <a:t>Route-level analysis reveals significant variation in seat comfort scores across destinations. Long-haul international routes tend to show lower comfort ratings, while select regional routes perform better. Aircraft type plays a key role: wide-body aircraft consistently receive higher ratings. Top-performing aircraft models show stronger overall satisfaction, reinforcing the link between equipment and passenger experience.</a:t>
-              </a:r>
-            </a:p>
-          </p:txBody>
-        </p:sp>
-      </p:grpSp>
-      <p:pic>
-        <p:nvPicPr>
-          <p:cNvPr id="14" name="Picture 13">
-            <a:extLst>
-              <a:ext uri="{FF2B5EF4-FFF2-40B4-BE49-F238E27FC236}">
-                <a16:creationId xmlns:a16="http://schemas.microsoft.com/office/drawing/2014/main" id="{C5B3AF55-B6F8-CB36-191D-7A16D22004CC}"/>
-              </a:ext>
-            </a:extLst>
-          </p:cNvPr>
-          <p:cNvPicPr>
-            <a:picLocks noChangeAspect="1"/>
-          </p:cNvPicPr>
-          <p:nvPr/>
-        </p:nvPicPr>
-        <p:blipFill>
-          <a:blip r:embed="rId2">
-            <a:extLst>
-              <a:ext uri="{28A0092B-C50C-407E-A947-70E740481C1C}">
-                <a14:useLocalDpi xmlns:a14="http://schemas.microsoft.com/office/drawing/2010/main" val="0"/>
-              </a:ext>
-            </a:extLst>
-          </a:blip>
-          <a:stretch>
-            <a:fillRect/>
-          </a:stretch>
-        </p:blipFill>
-        <p:spPr>
-          <a:xfrm>
-            <a:off x="9372600" y="2857500"/>
-            <a:ext cx="8510753" cy="4223166"/>
-          </a:xfrm>
-          <a:prstGeom prst="rect">
-            <a:avLst/>
-          </a:prstGeom>
-        </p:spPr>
-      </p:pic>
-    </p:spTree>
-  </p:cSld>
-  <p:clrMapOvr>
-    <a:masterClrMapping/>
-  </p:clrMapOvr>
-</p:sld>
-</file>
-
-<file path=ppt/slides/slide9.xml><?xml version="1.0" encoding="utf-8"?>
-<p:sld xmlns:a="http://schemas.openxmlformats.org/drawingml/2006/main" xmlns:r="http://schemas.openxmlformats.org/officeDocument/2006/relationships" xmlns:p="http://schemas.openxmlformats.org/presentationml/2006/main">
-  <p:cSld>
-    <p:bg>
-      <p:bgPr>
-        <a:gradFill rotWithShape="1">
-          <a:gsLst>
-            <a:gs pos="0">
-              <a:srgbClr val="6B1124">
-                <a:alpha val="100000"/>
-              </a:srgbClr>
-            </a:gs>
-            <a:gs pos="50000">
-              <a:srgbClr val="000000">
-                <a:alpha val="100000"/>
-              </a:srgbClr>
-            </a:gs>
-            <a:gs pos="100000">
-              <a:srgbClr val="6B1124">
-                <a:alpha val="100000"/>
-              </a:srgbClr>
-            </a:gs>
-          </a:gsLst>
-          <a:path path="circle">
-            <a:fillToRect r="100000" b="100000"/>
-          </a:path>
-          <a:tileRect l="-100000" t="-100000"/>
-        </a:gradFill>
-        <a:effectLst/>
-      </p:bgPr>
-    </p:bg>
-    <p:spTree>
-      <p:nvGrpSpPr>
-        <p:cNvPr id="1" name="">
-          <a:extLst>
-            <a:ext uri="{FF2B5EF4-FFF2-40B4-BE49-F238E27FC236}">
-              <a16:creationId xmlns:a16="http://schemas.microsoft.com/office/drawing/2014/main" id="{ED980F17-B991-D88D-18ED-384CBD60336F}"/>
-            </a:ext>
-          </a:extLst>
-        </p:cNvPr>
-        <p:cNvGrpSpPr/>
-        <p:nvPr/>
-      </p:nvGrpSpPr>
-      <p:grpSpPr>
-        <a:xfrm>
-          <a:off x="0" y="0"/>
-          <a:ext cx="0" cy="0"/>
-          <a:chOff x="0" y="0"/>
-          <a:chExt cx="0" cy="0"/>
-        </a:xfrm>
-      </p:grpSpPr>
-      <p:sp>
-        <p:nvSpPr>
-          <p:cNvPr id="2" name="AutoShape 2">
-            <a:extLst>
-              <a:ext uri="{FF2B5EF4-FFF2-40B4-BE49-F238E27FC236}">
-                <a16:creationId xmlns:a16="http://schemas.microsoft.com/office/drawing/2014/main" id="{939DE53B-8C97-5A3C-B15A-98AE4B94A528}"/>
-              </a:ext>
-            </a:extLst>
-          </p:cNvPr>
-          <p:cNvSpPr/>
-          <p:nvPr/>
-        </p:nvSpPr>
-        <p:spPr>
-          <a:xfrm flipV="1">
-            <a:off x="0" y="5143500"/>
-            <a:ext cx="18288000" cy="0"/>
-          </a:xfrm>
-          <a:prstGeom prst="line">
-            <a:avLst/>
-          </a:prstGeom>
-          <a:ln w="9525" cap="rnd">
-            <a:solidFill>
-              <a:srgbClr val="F4F4F4"/>
-            </a:solidFill>
-            <a:prstDash val="solid"/>
-            <a:headEnd type="none" w="sm" len="sm"/>
-            <a:tailEnd type="none" w="sm" len="sm"/>
-          </a:ln>
-        </p:spPr>
-      </p:sp>
-      <p:grpSp>
-        <p:nvGrpSpPr>
-          <p:cNvPr id="3" name="Group 3">
-            <a:extLst>
-              <a:ext uri="{FF2B5EF4-FFF2-40B4-BE49-F238E27FC236}">
-                <a16:creationId xmlns:a16="http://schemas.microsoft.com/office/drawing/2014/main" id="{AB0212D4-8AB7-E83A-E371-BC1C88BCA0F1}"/>
-              </a:ext>
-            </a:extLst>
-          </p:cNvPr>
-          <p:cNvGrpSpPr/>
-          <p:nvPr/>
-        </p:nvGrpSpPr>
-        <p:grpSpPr>
-          <a:xfrm>
-            <a:off x="1028700" y="1776560"/>
-            <a:ext cx="8839378" cy="6093187"/>
-            <a:chOff x="0" y="114300"/>
-            <a:chExt cx="11785838" cy="8124249"/>
-          </a:xfrm>
-        </p:grpSpPr>
-        <p:sp>
-          <p:nvSpPr>
-            <p:cNvPr id="4" name="TextBox 4">
-              <a:extLst>
-                <a:ext uri="{FF2B5EF4-FFF2-40B4-BE49-F238E27FC236}">
-                  <a16:creationId xmlns:a16="http://schemas.microsoft.com/office/drawing/2014/main" id="{A8940170-BFE9-400F-B39B-F651382D4C5C}"/>
-                </a:ext>
-              </a:extLst>
-            </p:cNvPr>
-            <p:cNvSpPr txBox="1"/>
-            <p:nvPr/>
-          </p:nvSpPr>
-          <p:spPr>
-            <a:xfrm>
-              <a:off x="0" y="114300"/>
-              <a:ext cx="11785838" cy="1619250"/>
-            </a:xfrm>
-            <a:prstGeom prst="rect">
-              <a:avLst/>
-            </a:prstGeom>
-          </p:spPr>
-          <p:txBody>
-            <a:bodyPr lIns="0" tIns="0" rIns="0" bIns="0" rtlCol="0" anchor="t">
-              <a:spAutoFit/>
-            </a:bodyPr>
-            <a:lstStyle/>
-            <a:p>
-              <a:pPr marL="0" lvl="0" indent="0" algn="l">
-                <a:lnSpc>
-                  <a:spcPts val="8122"/>
-                </a:lnSpc>
-              </a:pPr>
-              <a:r>
-                <a:rPr lang="en-US" sz="8550" b="1" spc="-359">
-                  <a:solidFill>
-                    <a:srgbClr val="F4F4F4"/>
-                  </a:solidFill>
-                  <a:latin typeface="Poppins Medium"/>
-                  <a:ea typeface="Poppins Medium"/>
-                  <a:cs typeface="Poppins Medium"/>
-                  <a:sym typeface="Poppins Medium"/>
-                </a:rPr>
-                <a:t>Overall Ratings</a:t>
-              </a:r>
-            </a:p>
-          </p:txBody>
-        </p:sp>
-        <p:sp>
-          <p:nvSpPr>
-            <p:cNvPr id="5" name="TextBox 5">
-              <a:extLst>
-                <a:ext uri="{FF2B5EF4-FFF2-40B4-BE49-F238E27FC236}">
-                  <a16:creationId xmlns:a16="http://schemas.microsoft.com/office/drawing/2014/main" id="{26D22F9D-F679-7215-D0C1-C0058DB15710}"/>
-                </a:ext>
-              </a:extLst>
-            </p:cNvPr>
-            <p:cNvSpPr txBox="1"/>
-            <p:nvPr/>
-          </p:nvSpPr>
-          <p:spPr>
-            <a:xfrm>
-              <a:off x="0" y="4636321"/>
-              <a:ext cx="9289355" cy="650640"/>
-            </a:xfrm>
-            <a:prstGeom prst="rect">
-              <a:avLst/>
-            </a:prstGeom>
-          </p:spPr>
-          <p:txBody>
-            <a:bodyPr lIns="0" tIns="0" rIns="0" bIns="0" rtlCol="0" anchor="t">
-              <a:spAutoFit/>
-            </a:bodyPr>
-            <a:lstStyle/>
-            <a:p>
-              <a:pPr marL="0" lvl="0" indent="0" algn="l">
-                <a:lnSpc>
-                  <a:spcPts val="3947"/>
-                </a:lnSpc>
-                <a:spcBef>
-                  <a:spcPct val="0"/>
-                </a:spcBef>
-              </a:pPr>
-              <a:r>
-                <a:rPr lang="en-US" sz="2819" spc="-118">
-                  <a:solidFill>
-                    <a:srgbClr val="F4F4F4"/>
-                  </a:solidFill>
-                  <a:latin typeface="Poppins"/>
-                  <a:ea typeface="Poppins"/>
-                  <a:cs typeface="Poppins"/>
-                  <a:sym typeface="Poppins"/>
-                </a:rPr>
-                <a:t>Rating Distribution by Service Category</a:t>
-              </a:r>
-            </a:p>
-          </p:txBody>
-        </p:sp>
-        <p:sp>
-          <p:nvSpPr>
-            <p:cNvPr id="6" name="TextBox 6">
-              <a:extLst>
-                <a:ext uri="{FF2B5EF4-FFF2-40B4-BE49-F238E27FC236}">
-                  <a16:creationId xmlns:a16="http://schemas.microsoft.com/office/drawing/2014/main" id="{87A4B63F-1548-AE4B-FD96-B5E1FE7FABA7}"/>
-                </a:ext>
-              </a:extLst>
-            </p:cNvPr>
-            <p:cNvSpPr txBox="1"/>
-            <p:nvPr/>
-          </p:nvSpPr>
-          <p:spPr>
-            <a:xfrm>
-              <a:off x="0" y="6010161"/>
-              <a:ext cx="9289355" cy="2228388"/>
-            </a:xfrm>
-            <a:prstGeom prst="rect">
-              <a:avLst/>
-            </a:prstGeom>
-          </p:spPr>
-          <p:txBody>
-            <a:bodyPr lIns="0" tIns="0" rIns="0" bIns="0" rtlCol="0" anchor="t">
-              <a:spAutoFit/>
-            </a:bodyPr>
-            <a:lstStyle/>
-            <a:p>
-              <a:pPr marL="0" lvl="0" indent="0" algn="just">
-                <a:lnSpc>
-                  <a:spcPts val="2238"/>
-                </a:lnSpc>
-                <a:spcBef>
-                  <a:spcPct val="0"/>
-                </a:spcBef>
-              </a:pPr>
-              <a:r>
-                <a:rPr lang="en-US" sz="1598" dirty="0">
-                  <a:solidFill>
-                    <a:srgbClr val="F4F4F4"/>
-                  </a:solidFill>
-                  <a:latin typeface="Inter Extra-Light"/>
-                  <a:ea typeface="Inter Extra-Light"/>
-                  <a:cs typeface="Inter Extra-Light"/>
-                  <a:sym typeface="Inter Extra-Light"/>
-                </a:rPr>
-                <a:t>Cabin Staff Service and Seat Comfort earn the highest ratings, clustering near 4–5 on recommended flights. Food &amp; Beverages and Inflight Entertainment sit mid‑range, while Ground Service and Value for Money show the widest variation, reflecting inconsistency across routes. Strong staff service and comfort emerge as the most reliable drivers of positive recommendations.</a:t>
-              </a:r>
-            </a:p>
-          </p:txBody>
-        </p:sp>
-      </p:grpSp>
-      <p:pic>
-        <p:nvPicPr>
-          <p:cNvPr id="14" name="Picture 13">
-            <a:extLst>
-              <a:ext uri="{FF2B5EF4-FFF2-40B4-BE49-F238E27FC236}">
-                <a16:creationId xmlns:a16="http://schemas.microsoft.com/office/drawing/2014/main" id="{0880C706-8645-EA20-1384-8CB400AAA862}"/>
-              </a:ext>
-            </a:extLst>
-          </p:cNvPr>
-          <p:cNvPicPr>
-            <a:picLocks noChangeAspect="1"/>
-          </p:cNvPicPr>
-          <p:nvPr/>
-        </p:nvPicPr>
-        <p:blipFill>
-          <a:blip r:embed="rId2">
-            <a:extLst>
-              <a:ext uri="{28A0092B-C50C-407E-A947-70E740481C1C}">
-                <a14:useLocalDpi xmlns:a14="http://schemas.microsoft.com/office/drawing/2010/main" val="0"/>
-              </a:ext>
-            </a:extLst>
-          </a:blip>
-          <a:stretch>
-            <a:fillRect/>
-          </a:stretch>
-        </p:blipFill>
-        <p:spPr>
-          <a:xfrm>
-            <a:off x="8686800" y="3314700"/>
-            <a:ext cx="8839378" cy="4386235"/>
-          </a:xfrm>
-          <a:prstGeom prst="rect">
-            <a:avLst/>
-          </a:prstGeom>
-        </p:spPr>
-      </p:pic>
-    </p:spTree>
-    <p:extLst>
-      <p:ext uri="{BB962C8B-B14F-4D97-AF65-F5344CB8AC3E}">
-        <p14:creationId xmlns:p14="http://schemas.microsoft.com/office/powerpoint/2010/main" val="663113684"/>
-      </p:ext>
-    </p:extLst>
   </p:cSld>
   <p:clrMapOvr>
     <a:masterClrMapping/>
